--- a/templates/Track_Record_Logo_TEMPLATE.pptx
+++ b/templates/Track_Record_Logo_TEMPLATE.pptx
@@ -2111,7 +2111,7 @@
                   </a:txBody>
                   <a:tcPr marT="0" marB="0" anchor="ctr">
                     <a:solidFill>
-                      <a:srgbClr val="147689"/>
+                      <a:srgbClr val="27C3F3"/>
                     </a:solidFill>
                   </a:tcPr>
                 </a:tc>
@@ -2138,7 +2138,7 @@
                   </a:txBody>
                   <a:tcPr marT="0" marB="0" anchor="ctr">
                     <a:solidFill>
-                      <a:srgbClr val="147689"/>
+                      <a:srgbClr val="27C3F3"/>
                     </a:solidFill>
                   </a:tcPr>
                 </a:tc>
@@ -2165,7 +2165,7 @@
                   </a:txBody>
                   <a:tcPr marT="0" marB="0" anchor="ctr">
                     <a:solidFill>
-                      <a:srgbClr val="147689"/>
+                      <a:srgbClr val="27C3F3"/>
                     </a:solidFill>
                   </a:tcPr>
                 </a:tc>
@@ -3529,7 +3529,7 @@
                   </a:txBody>
                   <a:tcPr marT="0" marB="0" anchor="ctr">
                     <a:solidFill>
-                      <a:srgbClr val="147689"/>
+                      <a:srgbClr val="27C3F3"/>
                     </a:solidFill>
                   </a:tcPr>
                 </a:tc>
@@ -3556,7 +3556,7 @@
                   </a:txBody>
                   <a:tcPr marT="0" marB="0" anchor="ctr">
                     <a:solidFill>
-                      <a:srgbClr val="147689"/>
+                      <a:srgbClr val="27C3F3"/>
                     </a:solidFill>
                   </a:tcPr>
                 </a:tc>
@@ -3583,7 +3583,7 @@
                   </a:txBody>
                   <a:tcPr marT="0" marB="0" anchor="ctr">
                     <a:solidFill>
-                      <a:srgbClr val="147689"/>
+                      <a:srgbClr val="27C3F3"/>
                     </a:solidFill>
                   </a:tcPr>
                 </a:tc>

--- a/templates/Track_Record_Logo_TEMPLATE.pptx
+++ b/templates/Track_Record_Logo_TEMPLATE.pptx
@@ -1957,7 +1957,7 @@
         </p:nvGraphicFramePr>
         <p:xfrm>
           <a:off x="538872" y="1051560"/>
-          <a:ext cx="5368152" cy="4971342"/>
+          <a:ext cx="5368152" cy="4801142"/>
         </p:xfrm>
         <a:graphic>
           <a:graphicData uri="http://schemas.openxmlformats.org/drawingml/2006/table">
@@ -1988,7 +1988,7 @@
                   </a:extLst>
                 </a:gridCol>
               </a:tblGrid>
-              <a:tr h="330200">
+              <a:tr h="250000">
                 <a:tc gridSpan="3">
                   <a:txBody>
                     <a:bodyPr/>
@@ -2044,7 +2044,7 @@
                   </a:ext>
                 </a:extLst>
               </a:tr>
-              <a:tr h="60000">
+              <a:tr h="20000">
                 <a:tc gridSpan="3">
                   <a:txBody>
                     <a:bodyPr/>
@@ -2087,7 +2087,7 @@
                   </a:ext>
                 </a:extLst>
               </a:tr>
-              <a:tr h="260000">
+              <a:tr h="210000">
                 <a:tc>
                   <a:txBody>
                     <a:bodyPr/>
@@ -3375,7 +3375,7 @@
         </p:nvGraphicFramePr>
         <p:xfrm>
           <a:off x="6277748" y="1051560"/>
-          <a:ext cx="5368152" cy="4971342"/>
+          <a:ext cx="5368152" cy="4801142"/>
         </p:xfrm>
         <a:graphic>
           <a:graphicData uri="http://schemas.openxmlformats.org/drawingml/2006/table">
@@ -3406,7 +3406,7 @@
                   </a:extLst>
                 </a:gridCol>
               </a:tblGrid>
-              <a:tr h="330200">
+              <a:tr h="250000">
                 <a:tc gridSpan="3">
                   <a:txBody>
                     <a:bodyPr/>
@@ -3462,7 +3462,7 @@
                   </a:ext>
                 </a:extLst>
               </a:tr>
-              <a:tr h="60000">
+              <a:tr h="20000">
                 <a:tc gridSpan="3">
                   <a:txBody>
                     <a:bodyPr/>
@@ -3505,7 +3505,7 @@
                   </a:ext>
                 </a:extLst>
               </a:tr>
-              <a:tr h="260000">
+              <a:tr h="210000">
                 <a:tc>
                   <a:txBody>
                     <a:bodyPr/>

--- a/templates/Track_Record_Logo_TEMPLATE.pptx
+++ b/templates/Track_Record_Logo_TEMPLATE.pptx
@@ -2222,7 +2222,7 @@
                     <a:bodyPr/>
                     <a:lstStyle/>
                     <a:p>
-                      <a:pPr algn="ctr"/>
+                      <a:pPr algn="l"/>
                       <a:r>
                         <a:rPr lang="en-US" sz="1000" dirty="0">
                           <a:solidFill>
@@ -2280,6 +2280,70 @@
                         <a:t>[Logo]</a:t>
                       </a:r>
                       <a:endParaRPr lang="en-GB" sz="1400" dirty="0"/>
+                    </a:p>
+                  </a:txBody>
+                  <a:tcPr marT="0" marB="0" anchor="ctr">
+                    <a:noFill/>
+                  </a:tcPr>
+                </a:tc>
+                <a:tc>
+                  <a:txBody>
+                    <a:bodyPr/>
+                    <a:lstStyle/>
+                    <a:p>
+                      <a:pPr marL="0" marR="0" lvl="0" indent="0" algn="l" defTabSz="914400" rtl="0" eaLnBrk="1" fontAlgn="auto" latinLnBrk="0" hangingPunct="1">
+                        <a:lnSpc>
+                          <a:spcPct val="100000"/>
+                        </a:lnSpc>
+                        <a:spcBef>
+                          <a:spcPts val="0"/>
+                        </a:spcBef>
+                        <a:spcAft>
+                          <a:spcPts val="0"/>
+                        </a:spcAft>
+                        <a:buClrTx/>
+                        <a:buSzTx/>
+                        <a:buFontTx/>
+                        <a:buNone/>
+                        <a:tabLst/>
+                        <a:defRPr/>
+                      </a:pPr>
+                      <a:r>
+                        <a:rPr lang="en-US" sz="1000" dirty="0">
+                          <a:solidFill>
+                            <a:srgbClr val="2C2E82"/>
+                          </a:solidFill>
+                        </a:rPr>
+                        <a:t>[City], [Country Abbr.]</a:t>
+                      </a:r>
+                      <a:endParaRPr lang="en-GB" sz="800" dirty="0"/>
+                    </a:p>
+                  </a:txBody>
+                  <a:tcPr marT="0" marB="0" anchor="ctr">
+                    <a:noFill/>
+                  </a:tcPr>
+                </a:tc>
+                <a:extLst>
+                  <a:ext uri="{0D108BD9-81ED-4DB2-BD59-A6C34878D82A}">
+                    <a16:rowId xmlns:a16="http://schemas.microsoft.com/office/drawing/2014/main" val="1979948562"/>
+                  </a:ext>
+                </a:extLst>
+              </a:tr>
+              <a:tr h="308653">
+                <a:tc>
+                  <a:txBody>
+                    <a:bodyPr/>
+                    <a:lstStyle/>
+                    <a:p>
+                      <a:r>
+                        <a:rPr lang="en-US" sz="1000" dirty="0">
+                          <a:solidFill>
+                            <a:srgbClr val="2C2E82"/>
+                          </a:solidFill>
+                        </a:rPr>
+                        <a:t>[Role Title]</a:t>
+                      </a:r>
+                      <a:endParaRPr lang="en-GB" sz="1200" dirty="0"/>
                     </a:p>
                   </a:txBody>
                   <a:tcPr marT="0" marB="0" anchor="ctr">
@@ -2314,9 +2378,30 @@
                             <a:srgbClr val="2C2E82"/>
                           </a:solidFill>
                         </a:rPr>
+                        <a:t>[Logo]</a:t>
+                      </a:r>
+                      <a:endParaRPr lang="en-GB" sz="1400" dirty="0"/>
+                    </a:p>
+                  </a:txBody>
+                  <a:tcPr marT="0" marB="0" anchor="ctr">
+                    <a:noFill/>
+                  </a:tcPr>
+                </a:tc>
+                <a:tc>
+                  <a:txBody>
+                    <a:bodyPr/>
+                    <a:lstStyle/>
+                    <a:p>
+                      <a:pPr algn="l"/>
+                      <a:r>
+                        <a:rPr lang="en-US" sz="1000" dirty="0">
+                          <a:solidFill>
+                            <a:srgbClr val="2C2E82"/>
+                          </a:solidFill>
+                        </a:rPr>
                         <a:t>[City], [Country Abbr.]</a:t>
                       </a:r>
-                      <a:endParaRPr lang="en-GB" sz="800" dirty="0"/>
+                      <a:endParaRPr lang="en-GB" sz="1200" dirty="0"/>
                     </a:p>
                   </a:txBody>
                   <a:tcPr marT="0" marB="0" anchor="ctr">
@@ -2325,7 +2410,92 @@
                 </a:tc>
                 <a:extLst>
                   <a:ext uri="{0D108BD9-81ED-4DB2-BD59-A6C34878D82A}">
-                    <a16:rowId xmlns:a16="http://schemas.microsoft.com/office/drawing/2014/main" val="1979948562"/>
+                    <a16:rowId xmlns:a16="http://schemas.microsoft.com/office/drawing/2014/main" val="875048262"/>
+                  </a:ext>
+                </a:extLst>
+              </a:tr>
+              <a:tr h="308653">
+                <a:tc>
+                  <a:txBody>
+                    <a:bodyPr/>
+                    <a:lstStyle/>
+                    <a:p>
+                      <a:r>
+                        <a:rPr lang="en-US" sz="1000" dirty="0">
+                          <a:solidFill>
+                            <a:srgbClr val="2C2E82"/>
+                          </a:solidFill>
+                        </a:rPr>
+                        <a:t>[Role Title]</a:t>
+                      </a:r>
+                      <a:endParaRPr lang="en-GB" sz="1200" dirty="0"/>
+                    </a:p>
+                  </a:txBody>
+                  <a:tcPr marT="0" marB="0" anchor="ctr">
+                    <a:noFill/>
+                  </a:tcPr>
+                </a:tc>
+                <a:tc>
+                  <a:txBody>
+                    <a:bodyPr/>
+                    <a:lstStyle/>
+                    <a:p>
+                      <a:pPr algn="ctr"/>
+                      <a:r>
+                        <a:rPr lang="en-US" sz="1000" dirty="0">
+                          <a:solidFill>
+                            <a:srgbClr val="2C2E82"/>
+                          </a:solidFill>
+                        </a:rPr>
+                        <a:t>[Logo]</a:t>
+                      </a:r>
+                      <a:endParaRPr lang="en-GB" sz="1400" dirty="0"/>
+                    </a:p>
+                  </a:txBody>
+                  <a:tcPr marT="0" marB="0" anchor="ctr">
+                    <a:noFill/>
+                  </a:tcPr>
+                </a:tc>
+                <a:tc>
+                  <a:txBody>
+                    <a:bodyPr/>
+                    <a:lstStyle/>
+                    <a:p>
+                      <a:pPr marL="0" marR="0" lvl="0" indent="0" algn="l" defTabSz="914400" rtl="0" eaLnBrk="1" fontAlgn="auto" latinLnBrk="0" hangingPunct="1">
+                        <a:lnSpc>
+                          <a:spcPct val="100000"/>
+                        </a:lnSpc>
+                        <a:spcBef>
+                          <a:spcPts val="0"/>
+                        </a:spcBef>
+                        <a:spcAft>
+                          <a:spcPts val="0"/>
+                        </a:spcAft>
+                        <a:buClrTx/>
+                        <a:buSzTx/>
+                        <a:buFontTx/>
+                        <a:buNone/>
+                        <a:tabLst/>
+                        <a:defRPr/>
+                      </a:pPr>
+                      <a:r>
+                        <a:rPr lang="en-US" sz="1000" dirty="0">
+                          <a:solidFill>
+                            <a:srgbClr val="2C2E82"/>
+                          </a:solidFill>
+                        </a:rPr>
+                        <a:t>[City], [Country Abbr.]</a:t>
+                      </a:r>
+                      <a:endParaRPr lang="en-GB" sz="800" dirty="0"/>
+                    </a:p>
+                  </a:txBody>
+                  <a:tcPr marT="0" marB="0" anchor="ctr">
+                    <a:noFill/>
+                  </a:tcPr>
+                </a:tc>
+                <a:extLst>
+                  <a:ext uri="{0D108BD9-81ED-4DB2-BD59-A6C34878D82A}">
+                    <a16:rowId xmlns:a16="http://schemas.microsoft.com/office/drawing/2014/main" val="2538150282"/>
                   </a:ext>
                 </a:extLst>
               </a:tr>
@@ -2392,7 +2562,7 @@
                     <a:bodyPr/>
                     <a:lstStyle/>
                     <a:p>
-                      <a:pPr algn="ctr"/>
+                      <a:pPr algn="l"/>
                       <a:r>
                         <a:rPr lang="en-US" sz="1000" dirty="0">
                           <a:solidFill>
@@ -2410,7 +2580,7 @@
                 </a:tc>
                 <a:extLst>
                   <a:ext uri="{0D108BD9-81ED-4DB2-BD59-A6C34878D82A}">
-                    <a16:rowId xmlns:a16="http://schemas.microsoft.com/office/drawing/2014/main" val="875048262"/>
+                    <a16:rowId xmlns:a16="http://schemas.microsoft.com/office/drawing/2014/main" val="2043059878"/>
                   </a:ext>
                 </a:extLst>
               </a:tr>
@@ -2450,6 +2620,70 @@
                         <a:t>[Logo]</a:t>
                       </a:r>
                       <a:endParaRPr lang="en-GB" sz="1400" dirty="0"/>
+                    </a:p>
+                  </a:txBody>
+                  <a:tcPr marT="0" marB="0" anchor="ctr">
+                    <a:noFill/>
+                  </a:tcPr>
+                </a:tc>
+                <a:tc>
+                  <a:txBody>
+                    <a:bodyPr/>
+                    <a:lstStyle/>
+                    <a:p>
+                      <a:pPr marL="0" marR="0" lvl="0" indent="0" algn="l" defTabSz="914400" rtl="0" eaLnBrk="1" fontAlgn="auto" latinLnBrk="0" hangingPunct="1">
+                        <a:lnSpc>
+                          <a:spcPct val="100000"/>
+                        </a:lnSpc>
+                        <a:spcBef>
+                          <a:spcPts val="0"/>
+                        </a:spcBef>
+                        <a:spcAft>
+                          <a:spcPts val="0"/>
+                        </a:spcAft>
+                        <a:buClrTx/>
+                        <a:buSzTx/>
+                        <a:buFontTx/>
+                        <a:buNone/>
+                        <a:tabLst/>
+                        <a:defRPr/>
+                      </a:pPr>
+                      <a:r>
+                        <a:rPr lang="en-US" sz="1000" dirty="0">
+                          <a:solidFill>
+                            <a:srgbClr val="2C2E82"/>
+                          </a:solidFill>
+                        </a:rPr>
+                        <a:t>[City], [Country Abbr.]</a:t>
+                      </a:r>
+                      <a:endParaRPr lang="en-GB" sz="800" dirty="0"/>
+                    </a:p>
+                  </a:txBody>
+                  <a:tcPr marT="0" marB="0" anchor="ctr">
+                    <a:noFill/>
+                  </a:tcPr>
+                </a:tc>
+                <a:extLst>
+                  <a:ext uri="{0D108BD9-81ED-4DB2-BD59-A6C34878D82A}">
+                    <a16:rowId xmlns:a16="http://schemas.microsoft.com/office/drawing/2014/main" val="3366287691"/>
+                  </a:ext>
+                </a:extLst>
+              </a:tr>
+              <a:tr h="308653">
+                <a:tc>
+                  <a:txBody>
+                    <a:bodyPr/>
+                    <a:lstStyle/>
+                    <a:p>
+                      <a:r>
+                        <a:rPr lang="en-US" sz="1000" dirty="0">
+                          <a:solidFill>
+                            <a:srgbClr val="2C2E82"/>
+                          </a:solidFill>
+                        </a:rPr>
+                        <a:t>[Role Title]</a:t>
+                      </a:r>
+                      <a:endParaRPr lang="en-GB" sz="1200" dirty="0"/>
                     </a:p>
                   </a:txBody>
                   <a:tcPr marT="0" marB="0" anchor="ctr">
@@ -2484,9 +2718,30 @@
                             <a:srgbClr val="2C2E82"/>
                           </a:solidFill>
                         </a:rPr>
+                        <a:t>[Logo]</a:t>
+                      </a:r>
+                      <a:endParaRPr lang="en-GB" sz="1400" dirty="0"/>
+                    </a:p>
+                  </a:txBody>
+                  <a:tcPr marT="0" marB="0" anchor="ctr">
+                    <a:noFill/>
+                  </a:tcPr>
+                </a:tc>
+                <a:tc>
+                  <a:txBody>
+                    <a:bodyPr/>
+                    <a:lstStyle/>
+                    <a:p>
+                      <a:pPr algn="l"/>
+                      <a:r>
+                        <a:rPr lang="en-US" sz="1000" dirty="0">
+                          <a:solidFill>
+                            <a:srgbClr val="2C2E82"/>
+                          </a:solidFill>
+                        </a:rPr>
                         <a:t>[City], [Country Abbr.]</a:t>
                       </a:r>
-                      <a:endParaRPr lang="en-GB" sz="800" dirty="0"/>
+                      <a:endParaRPr lang="en-GB" sz="1200" dirty="0"/>
                     </a:p>
                   </a:txBody>
                   <a:tcPr marT="0" marB="0" anchor="ctr">
@@ -2495,7 +2750,92 @@
                 </a:tc>
                 <a:extLst>
                   <a:ext uri="{0D108BD9-81ED-4DB2-BD59-A6C34878D82A}">
-                    <a16:rowId xmlns:a16="http://schemas.microsoft.com/office/drawing/2014/main" val="2538150282"/>
+                    <a16:rowId xmlns:a16="http://schemas.microsoft.com/office/drawing/2014/main" val="4236833438"/>
+                  </a:ext>
+                </a:extLst>
+              </a:tr>
+              <a:tr h="308653">
+                <a:tc>
+                  <a:txBody>
+                    <a:bodyPr/>
+                    <a:lstStyle/>
+                    <a:p>
+                      <a:r>
+                        <a:rPr lang="en-US" sz="1000" dirty="0">
+                          <a:solidFill>
+                            <a:srgbClr val="2C2E82"/>
+                          </a:solidFill>
+                        </a:rPr>
+                        <a:t>[Role Title]</a:t>
+                      </a:r>
+                      <a:endParaRPr lang="en-GB" sz="1200" dirty="0"/>
+                    </a:p>
+                  </a:txBody>
+                  <a:tcPr marT="0" marB="0" anchor="ctr">
+                    <a:noFill/>
+                  </a:tcPr>
+                </a:tc>
+                <a:tc>
+                  <a:txBody>
+                    <a:bodyPr/>
+                    <a:lstStyle/>
+                    <a:p>
+                      <a:pPr algn="ctr"/>
+                      <a:r>
+                        <a:rPr lang="en-US" sz="1000" dirty="0">
+                          <a:solidFill>
+                            <a:srgbClr val="2C2E82"/>
+                          </a:solidFill>
+                        </a:rPr>
+                        <a:t>[Logo]</a:t>
+                      </a:r>
+                      <a:endParaRPr lang="en-GB" sz="1400" dirty="0"/>
+                    </a:p>
+                  </a:txBody>
+                  <a:tcPr marT="0" marB="0" anchor="ctr">
+                    <a:noFill/>
+                  </a:tcPr>
+                </a:tc>
+                <a:tc>
+                  <a:txBody>
+                    <a:bodyPr/>
+                    <a:lstStyle/>
+                    <a:p>
+                      <a:pPr marL="0" marR="0" lvl="0" indent="0" algn="l" defTabSz="914400" rtl="0" eaLnBrk="1" fontAlgn="auto" latinLnBrk="0" hangingPunct="1">
+                        <a:lnSpc>
+                          <a:spcPct val="100000"/>
+                        </a:lnSpc>
+                        <a:spcBef>
+                          <a:spcPts val="0"/>
+                        </a:spcBef>
+                        <a:spcAft>
+                          <a:spcPts val="0"/>
+                        </a:spcAft>
+                        <a:buClrTx/>
+                        <a:buSzTx/>
+                        <a:buFontTx/>
+                        <a:buNone/>
+                        <a:tabLst/>
+                        <a:defRPr/>
+                      </a:pPr>
+                      <a:r>
+                        <a:rPr lang="en-US" sz="1000" dirty="0">
+                          <a:solidFill>
+                            <a:srgbClr val="2C2E82"/>
+                          </a:solidFill>
+                        </a:rPr>
+                        <a:t>[City], [Country Abbr.]</a:t>
+                      </a:r>
+                      <a:endParaRPr lang="en-GB" sz="800" dirty="0"/>
+                    </a:p>
+                  </a:txBody>
+                  <a:tcPr marT="0" marB="0" anchor="ctr">
+                    <a:noFill/>
+                  </a:tcPr>
+                </a:tc>
+                <a:extLst>
+                  <a:ext uri="{0D108BD9-81ED-4DB2-BD59-A6C34878D82A}">
+                    <a16:rowId xmlns:a16="http://schemas.microsoft.com/office/drawing/2014/main" val="2211659264"/>
                   </a:ext>
                 </a:extLst>
               </a:tr>
@@ -2562,7 +2902,7 @@
                     <a:bodyPr/>
                     <a:lstStyle/>
                     <a:p>
-                      <a:pPr algn="ctr"/>
+                      <a:pPr algn="l"/>
                       <a:r>
                         <a:rPr lang="en-US" sz="1000" dirty="0">
                           <a:solidFill>
@@ -2580,7 +2920,7 @@
                 </a:tc>
                 <a:extLst>
                   <a:ext uri="{0D108BD9-81ED-4DB2-BD59-A6C34878D82A}">
-                    <a16:rowId xmlns:a16="http://schemas.microsoft.com/office/drawing/2014/main" val="2043059878"/>
+                    <a16:rowId xmlns:a16="http://schemas.microsoft.com/office/drawing/2014/main" val="2569898499"/>
                   </a:ext>
                 </a:extLst>
               </a:tr>
@@ -2620,6 +2960,70 @@
                         <a:t>[Logo]</a:t>
                       </a:r>
                       <a:endParaRPr lang="en-GB" sz="1400" dirty="0"/>
+                    </a:p>
+                  </a:txBody>
+                  <a:tcPr marT="0" marB="0" anchor="ctr">
+                    <a:noFill/>
+                  </a:tcPr>
+                </a:tc>
+                <a:tc>
+                  <a:txBody>
+                    <a:bodyPr/>
+                    <a:lstStyle/>
+                    <a:p>
+                      <a:pPr marL="0" marR="0" lvl="0" indent="0" algn="l" defTabSz="914400" rtl="0" eaLnBrk="1" fontAlgn="auto" latinLnBrk="0" hangingPunct="1">
+                        <a:lnSpc>
+                          <a:spcPct val="100000"/>
+                        </a:lnSpc>
+                        <a:spcBef>
+                          <a:spcPts val="0"/>
+                        </a:spcBef>
+                        <a:spcAft>
+                          <a:spcPts val="0"/>
+                        </a:spcAft>
+                        <a:buClrTx/>
+                        <a:buSzTx/>
+                        <a:buFontTx/>
+                        <a:buNone/>
+                        <a:tabLst/>
+                        <a:defRPr/>
+                      </a:pPr>
+                      <a:r>
+                        <a:rPr lang="en-US" sz="1000" dirty="0">
+                          <a:solidFill>
+                            <a:srgbClr val="2C2E82"/>
+                          </a:solidFill>
+                        </a:rPr>
+                        <a:t>[City], [Country Abbr.]</a:t>
+                      </a:r>
+                      <a:endParaRPr lang="en-GB" sz="800" dirty="0"/>
+                    </a:p>
+                  </a:txBody>
+                  <a:tcPr marT="0" marB="0" anchor="ctr">
+                    <a:noFill/>
+                  </a:tcPr>
+                </a:tc>
+                <a:extLst>
+                  <a:ext uri="{0D108BD9-81ED-4DB2-BD59-A6C34878D82A}">
+                    <a16:rowId xmlns:a16="http://schemas.microsoft.com/office/drawing/2014/main" val="2928358824"/>
+                  </a:ext>
+                </a:extLst>
+              </a:tr>
+              <a:tr h="308653">
+                <a:tc>
+                  <a:txBody>
+                    <a:bodyPr/>
+                    <a:lstStyle/>
+                    <a:p>
+                      <a:r>
+                        <a:rPr lang="en-US" sz="1000" dirty="0">
+                          <a:solidFill>
+                            <a:srgbClr val="2C2E82"/>
+                          </a:solidFill>
+                        </a:rPr>
+                        <a:t>[Role Title]</a:t>
+                      </a:r>
+                      <a:endParaRPr lang="en-GB" sz="1200" dirty="0"/>
                     </a:p>
                   </a:txBody>
                   <a:tcPr marT="0" marB="0" anchor="ctr">
@@ -2654,9 +3058,30 @@
                             <a:srgbClr val="2C2E82"/>
                           </a:solidFill>
                         </a:rPr>
+                        <a:t>[Logo]</a:t>
+                      </a:r>
+                      <a:endParaRPr lang="en-GB" sz="1400" dirty="0"/>
+                    </a:p>
+                  </a:txBody>
+                  <a:tcPr marT="0" marB="0" anchor="ctr">
+                    <a:noFill/>
+                  </a:tcPr>
+                </a:tc>
+                <a:tc>
+                  <a:txBody>
+                    <a:bodyPr/>
+                    <a:lstStyle/>
+                    <a:p>
+                      <a:pPr algn="l"/>
+                      <a:r>
+                        <a:rPr lang="en-US" sz="1000" dirty="0">
+                          <a:solidFill>
+                            <a:srgbClr val="2C2E82"/>
+                          </a:solidFill>
+                        </a:rPr>
                         <a:t>[City], [Country Abbr.]</a:t>
                       </a:r>
-                      <a:endParaRPr lang="en-GB" sz="800" dirty="0"/>
+                      <a:endParaRPr lang="en-GB" sz="1200" dirty="0"/>
                     </a:p>
                   </a:txBody>
                   <a:tcPr marT="0" marB="0" anchor="ctr">
@@ -2665,7 +3090,92 @@
                 </a:tc>
                 <a:extLst>
                   <a:ext uri="{0D108BD9-81ED-4DB2-BD59-A6C34878D82A}">
-                    <a16:rowId xmlns:a16="http://schemas.microsoft.com/office/drawing/2014/main" val="3366287691"/>
+                    <a16:rowId xmlns:a16="http://schemas.microsoft.com/office/drawing/2014/main" val="2485488683"/>
+                  </a:ext>
+                </a:extLst>
+              </a:tr>
+              <a:tr h="308653">
+                <a:tc>
+                  <a:txBody>
+                    <a:bodyPr/>
+                    <a:lstStyle/>
+                    <a:p>
+                      <a:r>
+                        <a:rPr lang="en-US" sz="1000" dirty="0">
+                          <a:solidFill>
+                            <a:srgbClr val="2C2E82"/>
+                          </a:solidFill>
+                        </a:rPr>
+                        <a:t>[Role Title]</a:t>
+                      </a:r>
+                      <a:endParaRPr lang="en-GB" sz="1200" dirty="0"/>
+                    </a:p>
+                  </a:txBody>
+                  <a:tcPr marT="0" marB="0" anchor="ctr">
+                    <a:noFill/>
+                  </a:tcPr>
+                </a:tc>
+                <a:tc>
+                  <a:txBody>
+                    <a:bodyPr/>
+                    <a:lstStyle/>
+                    <a:p>
+                      <a:pPr algn="ctr"/>
+                      <a:r>
+                        <a:rPr lang="en-US" sz="1000" dirty="0">
+                          <a:solidFill>
+                            <a:srgbClr val="2C2E82"/>
+                          </a:solidFill>
+                        </a:rPr>
+                        <a:t>[Logo]</a:t>
+                      </a:r>
+                      <a:endParaRPr lang="en-GB" sz="1400" dirty="0"/>
+                    </a:p>
+                  </a:txBody>
+                  <a:tcPr marT="0" marB="0" anchor="ctr">
+                    <a:noFill/>
+                  </a:tcPr>
+                </a:tc>
+                <a:tc>
+                  <a:txBody>
+                    <a:bodyPr/>
+                    <a:lstStyle/>
+                    <a:p>
+                      <a:pPr marL="0" marR="0" lvl="0" indent="0" algn="l" defTabSz="914400" rtl="0" eaLnBrk="1" fontAlgn="auto" latinLnBrk="0" hangingPunct="1">
+                        <a:lnSpc>
+                          <a:spcPct val="100000"/>
+                        </a:lnSpc>
+                        <a:spcBef>
+                          <a:spcPts val="0"/>
+                        </a:spcBef>
+                        <a:spcAft>
+                          <a:spcPts val="0"/>
+                        </a:spcAft>
+                        <a:buClrTx/>
+                        <a:buSzTx/>
+                        <a:buFontTx/>
+                        <a:buNone/>
+                        <a:tabLst/>
+                        <a:defRPr/>
+                      </a:pPr>
+                      <a:r>
+                        <a:rPr lang="en-US" sz="1000" dirty="0">
+                          <a:solidFill>
+                            <a:srgbClr val="2C2E82"/>
+                          </a:solidFill>
+                        </a:rPr>
+                        <a:t>[City], [Country Abbr.]</a:t>
+                      </a:r>
+                      <a:endParaRPr lang="en-GB" sz="800" dirty="0"/>
+                    </a:p>
+                  </a:txBody>
+                  <a:tcPr marT="0" marB="0" anchor="ctr">
+                    <a:noFill/>
+                  </a:tcPr>
+                </a:tc>
+                <a:extLst>
+                  <a:ext uri="{0D108BD9-81ED-4DB2-BD59-A6C34878D82A}">
+                    <a16:rowId xmlns:a16="http://schemas.microsoft.com/office/drawing/2014/main" val="3925639905"/>
                   </a:ext>
                 </a:extLst>
               </a:tr>
@@ -2732,517 +3242,7 @@
                     <a:bodyPr/>
                     <a:lstStyle/>
                     <a:p>
-                      <a:pPr algn="ctr"/>
-                      <a:r>
-                        <a:rPr lang="en-US" sz="1000" dirty="0">
-                          <a:solidFill>
-                            <a:srgbClr val="2C2E82"/>
-                          </a:solidFill>
-                        </a:rPr>
-                        <a:t>[City], [Country Abbr.]</a:t>
-                      </a:r>
-                      <a:endParaRPr lang="en-GB" sz="1200" dirty="0"/>
-                    </a:p>
-                  </a:txBody>
-                  <a:tcPr marT="0" marB="0" anchor="ctr">
-                    <a:noFill/>
-                  </a:tcPr>
-                </a:tc>
-                <a:extLst>
-                  <a:ext uri="{0D108BD9-81ED-4DB2-BD59-A6C34878D82A}">
-                    <a16:rowId xmlns:a16="http://schemas.microsoft.com/office/drawing/2014/main" val="4236833438"/>
-                  </a:ext>
-                </a:extLst>
-              </a:tr>
-              <a:tr h="308653">
-                <a:tc>
-                  <a:txBody>
-                    <a:bodyPr/>
-                    <a:lstStyle/>
-                    <a:p>
-                      <a:r>
-                        <a:rPr lang="en-US" sz="1000" dirty="0">
-                          <a:solidFill>
-                            <a:srgbClr val="2C2E82"/>
-                          </a:solidFill>
-                        </a:rPr>
-                        <a:t>[Role Title]</a:t>
-                      </a:r>
-                      <a:endParaRPr lang="en-GB" sz="1200" dirty="0"/>
-                    </a:p>
-                  </a:txBody>
-                  <a:tcPr marT="0" marB="0" anchor="ctr">
-                    <a:noFill/>
-                  </a:tcPr>
-                </a:tc>
-                <a:tc>
-                  <a:txBody>
-                    <a:bodyPr/>
-                    <a:lstStyle/>
-                    <a:p>
-                      <a:pPr algn="ctr"/>
-                      <a:r>
-                        <a:rPr lang="en-US" sz="1000" dirty="0">
-                          <a:solidFill>
-                            <a:srgbClr val="2C2E82"/>
-                          </a:solidFill>
-                        </a:rPr>
-                        <a:t>[Logo]</a:t>
-                      </a:r>
-                      <a:endParaRPr lang="en-GB" sz="1400" dirty="0"/>
-                    </a:p>
-                  </a:txBody>
-                  <a:tcPr marT="0" marB="0" anchor="ctr">
-                    <a:noFill/>
-                  </a:tcPr>
-                </a:tc>
-                <a:tc>
-                  <a:txBody>
-                    <a:bodyPr/>
-                    <a:lstStyle/>
-                    <a:p>
-                      <a:pPr marL="0" marR="0" lvl="0" indent="0" algn="ctr" defTabSz="914400" rtl="0" eaLnBrk="1" fontAlgn="auto" latinLnBrk="0" hangingPunct="1">
-                        <a:lnSpc>
-                          <a:spcPct val="100000"/>
-                        </a:lnSpc>
-                        <a:spcBef>
-                          <a:spcPts val="0"/>
-                        </a:spcBef>
-                        <a:spcAft>
-                          <a:spcPts val="0"/>
-                        </a:spcAft>
-                        <a:buClrTx/>
-                        <a:buSzTx/>
-                        <a:buFontTx/>
-                        <a:buNone/>
-                        <a:tabLst/>
-                        <a:defRPr/>
-                      </a:pPr>
-                      <a:r>
-                        <a:rPr lang="en-US" sz="1000" dirty="0">
-                          <a:solidFill>
-                            <a:srgbClr val="2C2E82"/>
-                          </a:solidFill>
-                        </a:rPr>
-                        <a:t>[City], [Country Abbr.]</a:t>
-                      </a:r>
-                      <a:endParaRPr lang="en-GB" sz="800" dirty="0"/>
-                    </a:p>
-                  </a:txBody>
-                  <a:tcPr marT="0" marB="0" anchor="ctr">
-                    <a:noFill/>
-                  </a:tcPr>
-                </a:tc>
-                <a:extLst>
-                  <a:ext uri="{0D108BD9-81ED-4DB2-BD59-A6C34878D82A}">
-                    <a16:rowId xmlns:a16="http://schemas.microsoft.com/office/drawing/2014/main" val="2211659264"/>
-                  </a:ext>
-                </a:extLst>
-              </a:tr>
-              <a:tr h="308653">
-                <a:tc>
-                  <a:txBody>
-                    <a:bodyPr/>
-                    <a:lstStyle/>
-                    <a:p>
-                      <a:r>
-                        <a:rPr lang="en-US" sz="1000" dirty="0">
-                          <a:solidFill>
-                            <a:srgbClr val="2C2E82"/>
-                          </a:solidFill>
-                        </a:rPr>
-                        <a:t>[Role Title]</a:t>
-                      </a:r>
-                      <a:endParaRPr lang="en-GB" sz="1200" dirty="0"/>
-                    </a:p>
-                  </a:txBody>
-                  <a:tcPr marT="0" marB="0" anchor="ctr">
-                    <a:noFill/>
-                  </a:tcPr>
-                </a:tc>
-                <a:tc>
-                  <a:txBody>
-                    <a:bodyPr/>
-                    <a:lstStyle/>
-                    <a:p>
-                      <a:pPr marL="0" marR="0" lvl="0" indent="0" algn="ctr" defTabSz="914400" rtl="0" eaLnBrk="1" fontAlgn="auto" latinLnBrk="0" hangingPunct="1">
-                        <a:lnSpc>
-                          <a:spcPct val="100000"/>
-                        </a:lnSpc>
-                        <a:spcBef>
-                          <a:spcPts val="0"/>
-                        </a:spcBef>
-                        <a:spcAft>
-                          <a:spcPts val="0"/>
-                        </a:spcAft>
-                        <a:buClrTx/>
-                        <a:buSzTx/>
-                        <a:buFontTx/>
-                        <a:buNone/>
-                        <a:tabLst/>
-                        <a:defRPr/>
-                      </a:pPr>
-                      <a:r>
-                        <a:rPr lang="en-US" sz="1000" dirty="0">
-                          <a:solidFill>
-                            <a:srgbClr val="2C2E82"/>
-                          </a:solidFill>
-                        </a:rPr>
-                        <a:t>[Logo]</a:t>
-                      </a:r>
-                      <a:endParaRPr lang="en-GB" sz="1400" dirty="0"/>
-                    </a:p>
-                  </a:txBody>
-                  <a:tcPr marT="0" marB="0" anchor="ctr">
-                    <a:noFill/>
-                  </a:tcPr>
-                </a:tc>
-                <a:tc>
-                  <a:txBody>
-                    <a:bodyPr/>
-                    <a:lstStyle/>
-                    <a:p>
-                      <a:pPr algn="ctr"/>
-                      <a:r>
-                        <a:rPr lang="en-US" sz="1000" dirty="0">
-                          <a:solidFill>
-                            <a:srgbClr val="2C2E82"/>
-                          </a:solidFill>
-                        </a:rPr>
-                        <a:t>[City], [Country Abbr.]</a:t>
-                      </a:r>
-                      <a:endParaRPr lang="en-GB" sz="1200" dirty="0"/>
-                    </a:p>
-                  </a:txBody>
-                  <a:tcPr marT="0" marB="0" anchor="ctr">
-                    <a:noFill/>
-                  </a:tcPr>
-                </a:tc>
-                <a:extLst>
-                  <a:ext uri="{0D108BD9-81ED-4DB2-BD59-A6C34878D82A}">
-                    <a16:rowId xmlns:a16="http://schemas.microsoft.com/office/drawing/2014/main" val="2569898499"/>
-                  </a:ext>
-                </a:extLst>
-              </a:tr>
-              <a:tr h="308653">
-                <a:tc>
-                  <a:txBody>
-                    <a:bodyPr/>
-                    <a:lstStyle/>
-                    <a:p>
-                      <a:r>
-                        <a:rPr lang="en-US" sz="1000" dirty="0">
-                          <a:solidFill>
-                            <a:srgbClr val="2C2E82"/>
-                          </a:solidFill>
-                        </a:rPr>
-                        <a:t>[Role Title]</a:t>
-                      </a:r>
-                      <a:endParaRPr lang="en-GB" sz="1200" dirty="0"/>
-                    </a:p>
-                  </a:txBody>
-                  <a:tcPr marT="0" marB="0" anchor="ctr">
-                    <a:noFill/>
-                  </a:tcPr>
-                </a:tc>
-                <a:tc>
-                  <a:txBody>
-                    <a:bodyPr/>
-                    <a:lstStyle/>
-                    <a:p>
-                      <a:pPr algn="ctr"/>
-                      <a:r>
-                        <a:rPr lang="en-US" sz="1000" dirty="0">
-                          <a:solidFill>
-                            <a:srgbClr val="2C2E82"/>
-                          </a:solidFill>
-                        </a:rPr>
-                        <a:t>[Logo]</a:t>
-                      </a:r>
-                      <a:endParaRPr lang="en-GB" sz="1400" dirty="0"/>
-                    </a:p>
-                  </a:txBody>
-                  <a:tcPr marT="0" marB="0" anchor="ctr">
-                    <a:noFill/>
-                  </a:tcPr>
-                </a:tc>
-                <a:tc>
-                  <a:txBody>
-                    <a:bodyPr/>
-                    <a:lstStyle/>
-                    <a:p>
-                      <a:pPr marL="0" marR="0" lvl="0" indent="0" algn="ctr" defTabSz="914400" rtl="0" eaLnBrk="1" fontAlgn="auto" latinLnBrk="0" hangingPunct="1">
-                        <a:lnSpc>
-                          <a:spcPct val="100000"/>
-                        </a:lnSpc>
-                        <a:spcBef>
-                          <a:spcPts val="0"/>
-                        </a:spcBef>
-                        <a:spcAft>
-                          <a:spcPts val="0"/>
-                        </a:spcAft>
-                        <a:buClrTx/>
-                        <a:buSzTx/>
-                        <a:buFontTx/>
-                        <a:buNone/>
-                        <a:tabLst/>
-                        <a:defRPr/>
-                      </a:pPr>
-                      <a:r>
-                        <a:rPr lang="en-US" sz="1000" dirty="0">
-                          <a:solidFill>
-                            <a:srgbClr val="2C2E82"/>
-                          </a:solidFill>
-                        </a:rPr>
-                        <a:t>[City], [Country Abbr.]</a:t>
-                      </a:r>
-                      <a:endParaRPr lang="en-GB" sz="800" dirty="0"/>
-                    </a:p>
-                  </a:txBody>
-                  <a:tcPr marT="0" marB="0" anchor="ctr">
-                    <a:noFill/>
-                  </a:tcPr>
-                </a:tc>
-                <a:extLst>
-                  <a:ext uri="{0D108BD9-81ED-4DB2-BD59-A6C34878D82A}">
-                    <a16:rowId xmlns:a16="http://schemas.microsoft.com/office/drawing/2014/main" val="2928358824"/>
-                  </a:ext>
-                </a:extLst>
-              </a:tr>
-              <a:tr h="308653">
-                <a:tc>
-                  <a:txBody>
-                    <a:bodyPr/>
-                    <a:lstStyle/>
-                    <a:p>
-                      <a:r>
-                        <a:rPr lang="en-US" sz="1000" dirty="0">
-                          <a:solidFill>
-                            <a:srgbClr val="2C2E82"/>
-                          </a:solidFill>
-                        </a:rPr>
-                        <a:t>[Role Title]</a:t>
-                      </a:r>
-                      <a:endParaRPr lang="en-GB" sz="1200" dirty="0"/>
-                    </a:p>
-                  </a:txBody>
-                  <a:tcPr marT="0" marB="0" anchor="ctr">
-                    <a:noFill/>
-                  </a:tcPr>
-                </a:tc>
-                <a:tc>
-                  <a:txBody>
-                    <a:bodyPr/>
-                    <a:lstStyle/>
-                    <a:p>
-                      <a:pPr marL="0" marR="0" lvl="0" indent="0" algn="ctr" defTabSz="914400" rtl="0" eaLnBrk="1" fontAlgn="auto" latinLnBrk="0" hangingPunct="1">
-                        <a:lnSpc>
-                          <a:spcPct val="100000"/>
-                        </a:lnSpc>
-                        <a:spcBef>
-                          <a:spcPts val="0"/>
-                        </a:spcBef>
-                        <a:spcAft>
-                          <a:spcPts val="0"/>
-                        </a:spcAft>
-                        <a:buClrTx/>
-                        <a:buSzTx/>
-                        <a:buFontTx/>
-                        <a:buNone/>
-                        <a:tabLst/>
-                        <a:defRPr/>
-                      </a:pPr>
-                      <a:r>
-                        <a:rPr lang="en-US" sz="1000" dirty="0">
-                          <a:solidFill>
-                            <a:srgbClr val="2C2E82"/>
-                          </a:solidFill>
-                        </a:rPr>
-                        <a:t>[Logo]</a:t>
-                      </a:r>
-                      <a:endParaRPr lang="en-GB" sz="1400" dirty="0"/>
-                    </a:p>
-                  </a:txBody>
-                  <a:tcPr marT="0" marB="0" anchor="ctr">
-                    <a:noFill/>
-                  </a:tcPr>
-                </a:tc>
-                <a:tc>
-                  <a:txBody>
-                    <a:bodyPr/>
-                    <a:lstStyle/>
-                    <a:p>
-                      <a:pPr algn="ctr"/>
-                      <a:r>
-                        <a:rPr lang="en-US" sz="1000" dirty="0">
-                          <a:solidFill>
-                            <a:srgbClr val="2C2E82"/>
-                          </a:solidFill>
-                        </a:rPr>
-                        <a:t>[City], [Country Abbr.]</a:t>
-                      </a:r>
-                      <a:endParaRPr lang="en-GB" sz="1200" dirty="0"/>
-                    </a:p>
-                  </a:txBody>
-                  <a:tcPr marT="0" marB="0" anchor="ctr">
-                    <a:noFill/>
-                  </a:tcPr>
-                </a:tc>
-                <a:extLst>
-                  <a:ext uri="{0D108BD9-81ED-4DB2-BD59-A6C34878D82A}">
-                    <a16:rowId xmlns:a16="http://schemas.microsoft.com/office/drawing/2014/main" val="2485488683"/>
-                  </a:ext>
-                </a:extLst>
-              </a:tr>
-              <a:tr h="308653">
-                <a:tc>
-                  <a:txBody>
-                    <a:bodyPr/>
-                    <a:lstStyle/>
-                    <a:p>
-                      <a:r>
-                        <a:rPr lang="en-US" sz="1000" dirty="0">
-                          <a:solidFill>
-                            <a:srgbClr val="2C2E82"/>
-                          </a:solidFill>
-                        </a:rPr>
-                        <a:t>[Role Title]</a:t>
-                      </a:r>
-                      <a:endParaRPr lang="en-GB" sz="1200" dirty="0"/>
-                    </a:p>
-                  </a:txBody>
-                  <a:tcPr marT="0" marB="0" anchor="ctr">
-                    <a:noFill/>
-                  </a:tcPr>
-                </a:tc>
-                <a:tc>
-                  <a:txBody>
-                    <a:bodyPr/>
-                    <a:lstStyle/>
-                    <a:p>
-                      <a:pPr algn="ctr"/>
-                      <a:r>
-                        <a:rPr lang="en-US" sz="1000" dirty="0">
-                          <a:solidFill>
-                            <a:srgbClr val="2C2E82"/>
-                          </a:solidFill>
-                        </a:rPr>
-                        <a:t>[Logo]</a:t>
-                      </a:r>
-                      <a:endParaRPr lang="en-GB" sz="1400" dirty="0"/>
-                    </a:p>
-                  </a:txBody>
-                  <a:tcPr marT="0" marB="0" anchor="ctr">
-                    <a:noFill/>
-                  </a:tcPr>
-                </a:tc>
-                <a:tc>
-                  <a:txBody>
-                    <a:bodyPr/>
-                    <a:lstStyle/>
-                    <a:p>
-                      <a:pPr marL="0" marR="0" lvl="0" indent="0" algn="ctr" defTabSz="914400" rtl="0" eaLnBrk="1" fontAlgn="auto" latinLnBrk="0" hangingPunct="1">
-                        <a:lnSpc>
-                          <a:spcPct val="100000"/>
-                        </a:lnSpc>
-                        <a:spcBef>
-                          <a:spcPts val="0"/>
-                        </a:spcBef>
-                        <a:spcAft>
-                          <a:spcPts val="0"/>
-                        </a:spcAft>
-                        <a:buClrTx/>
-                        <a:buSzTx/>
-                        <a:buFontTx/>
-                        <a:buNone/>
-                        <a:tabLst/>
-                        <a:defRPr/>
-                      </a:pPr>
-                      <a:r>
-                        <a:rPr lang="en-US" sz="1000" dirty="0">
-                          <a:solidFill>
-                            <a:srgbClr val="2C2E82"/>
-                          </a:solidFill>
-                        </a:rPr>
-                        <a:t>[City], [Country Abbr.]</a:t>
-                      </a:r>
-                      <a:endParaRPr lang="en-GB" sz="800" dirty="0"/>
-                    </a:p>
-                  </a:txBody>
-                  <a:tcPr marT="0" marB="0" anchor="ctr">
-                    <a:noFill/>
-                  </a:tcPr>
-                </a:tc>
-                <a:extLst>
-                  <a:ext uri="{0D108BD9-81ED-4DB2-BD59-A6C34878D82A}">
-                    <a16:rowId xmlns:a16="http://schemas.microsoft.com/office/drawing/2014/main" val="3925639905"/>
-                  </a:ext>
-                </a:extLst>
-              </a:tr>
-              <a:tr h="308653">
-                <a:tc>
-                  <a:txBody>
-                    <a:bodyPr/>
-                    <a:lstStyle/>
-                    <a:p>
-                      <a:r>
-                        <a:rPr lang="en-US" sz="1000" dirty="0">
-                          <a:solidFill>
-                            <a:srgbClr val="2C2E82"/>
-                          </a:solidFill>
-                        </a:rPr>
-                        <a:t>[Role Title]</a:t>
-                      </a:r>
-                      <a:endParaRPr lang="en-GB" sz="1200" dirty="0"/>
-                    </a:p>
-                  </a:txBody>
-                  <a:tcPr marT="0" marB="0" anchor="ctr">
-                    <a:noFill/>
-                  </a:tcPr>
-                </a:tc>
-                <a:tc>
-                  <a:txBody>
-                    <a:bodyPr/>
-                    <a:lstStyle/>
-                    <a:p>
-                      <a:pPr marL="0" marR="0" lvl="0" indent="0" algn="ctr" defTabSz="914400" rtl="0" eaLnBrk="1" fontAlgn="auto" latinLnBrk="0" hangingPunct="1">
-                        <a:lnSpc>
-                          <a:spcPct val="100000"/>
-                        </a:lnSpc>
-                        <a:spcBef>
-                          <a:spcPts val="0"/>
-                        </a:spcBef>
-                        <a:spcAft>
-                          <a:spcPts val="0"/>
-                        </a:spcAft>
-                        <a:buClrTx/>
-                        <a:buSzTx/>
-                        <a:buFontTx/>
-                        <a:buNone/>
-                        <a:tabLst/>
-                        <a:defRPr/>
-                      </a:pPr>
-                      <a:r>
-                        <a:rPr lang="en-US" sz="1000" dirty="0">
-                          <a:solidFill>
-                            <a:srgbClr val="2C2E82"/>
-                          </a:solidFill>
-                        </a:rPr>
-                        <a:t>[Logo]</a:t>
-                      </a:r>
-                      <a:endParaRPr lang="en-GB" sz="1400" dirty="0"/>
-                    </a:p>
-                  </a:txBody>
-                  <a:tcPr marT="0" marB="0" anchor="ctr">
-                    <a:noFill/>
-                  </a:tcPr>
-                </a:tc>
-                <a:tc>
-                  <a:txBody>
-                    <a:bodyPr/>
-                    <a:lstStyle/>
-                    <a:p>
-                      <a:pPr algn="ctr"/>
+                      <a:pPr algn="l"/>
                       <a:r>
                         <a:rPr lang="en-US" sz="1000" dirty="0">
                           <a:solidFill>
@@ -3311,7 +3311,7 @@
                     <a:bodyPr/>
                     <a:lstStyle/>
                     <a:p>
-                      <a:pPr marL="0" marR="0" lvl="0" indent="0" algn="ctr" defTabSz="914400" rtl="0" eaLnBrk="1" fontAlgn="auto" latinLnBrk="0" hangingPunct="1">
+                      <a:pPr marL="0" marR="0" lvl="0" indent="0" algn="l" defTabSz="914400" rtl="0" eaLnBrk="1" fontAlgn="auto" latinLnBrk="0" hangingPunct="1">
                         <a:lnSpc>
                           <a:spcPct val="100000"/>
                         </a:lnSpc>
@@ -3640,7 +3640,7 @@
                     <a:bodyPr/>
                     <a:lstStyle/>
                     <a:p>
-                      <a:pPr algn="ctr"/>
+                      <a:pPr algn="l"/>
                       <a:r>
                         <a:rPr lang="en-US" sz="1000" dirty="0">
                           <a:solidFill>
@@ -3698,6 +3698,70 @@
                         <a:t>[Logo]</a:t>
                       </a:r>
                       <a:endParaRPr lang="en-GB" sz="1400" dirty="0"/>
+                    </a:p>
+                  </a:txBody>
+                  <a:tcPr marT="0" marB="0" anchor="ctr">
+                    <a:noFill/>
+                  </a:tcPr>
+                </a:tc>
+                <a:tc>
+                  <a:txBody>
+                    <a:bodyPr/>
+                    <a:lstStyle/>
+                    <a:p>
+                      <a:pPr marL="0" marR="0" lvl="0" indent="0" algn="l" defTabSz="914400" rtl="0" eaLnBrk="1" fontAlgn="auto" latinLnBrk="0" hangingPunct="1">
+                        <a:lnSpc>
+                          <a:spcPct val="100000"/>
+                        </a:lnSpc>
+                        <a:spcBef>
+                          <a:spcPts val="0"/>
+                        </a:spcBef>
+                        <a:spcAft>
+                          <a:spcPts val="0"/>
+                        </a:spcAft>
+                        <a:buClrTx/>
+                        <a:buSzTx/>
+                        <a:buFontTx/>
+                        <a:buNone/>
+                        <a:tabLst/>
+                        <a:defRPr/>
+                      </a:pPr>
+                      <a:r>
+                        <a:rPr lang="en-US" sz="1000" dirty="0">
+                          <a:solidFill>
+                            <a:srgbClr val="2C2E82"/>
+                          </a:solidFill>
+                        </a:rPr>
+                        <a:t>[City], [Country Abbr.]</a:t>
+                      </a:r>
+                      <a:endParaRPr lang="en-GB" sz="800" dirty="0"/>
+                    </a:p>
+                  </a:txBody>
+                  <a:tcPr marT="0" marB="0" anchor="ctr">
+                    <a:noFill/>
+                  </a:tcPr>
+                </a:tc>
+                <a:extLst>
+                  <a:ext uri="{0D108BD9-81ED-4DB2-BD59-A6C34878D82A}">
+                    <a16:rowId xmlns:a16="http://schemas.microsoft.com/office/drawing/2014/main" val="1979948562"/>
+                  </a:ext>
+                </a:extLst>
+              </a:tr>
+              <a:tr h="308653">
+                <a:tc>
+                  <a:txBody>
+                    <a:bodyPr/>
+                    <a:lstStyle/>
+                    <a:p>
+                      <a:r>
+                        <a:rPr lang="en-US" sz="1000" dirty="0">
+                          <a:solidFill>
+                            <a:srgbClr val="2C2E82"/>
+                          </a:solidFill>
+                        </a:rPr>
+                        <a:t>[Role Title]</a:t>
+                      </a:r>
+                      <a:endParaRPr lang="en-GB" sz="1200" dirty="0"/>
                     </a:p>
                   </a:txBody>
                   <a:tcPr marT="0" marB="0" anchor="ctr">
@@ -3732,9 +3796,30 @@
                             <a:srgbClr val="2C2E82"/>
                           </a:solidFill>
                         </a:rPr>
+                        <a:t>[Logo]</a:t>
+                      </a:r>
+                      <a:endParaRPr lang="en-GB" sz="1400" dirty="0"/>
+                    </a:p>
+                  </a:txBody>
+                  <a:tcPr marT="0" marB="0" anchor="ctr">
+                    <a:noFill/>
+                  </a:tcPr>
+                </a:tc>
+                <a:tc>
+                  <a:txBody>
+                    <a:bodyPr/>
+                    <a:lstStyle/>
+                    <a:p>
+                      <a:pPr algn="l"/>
+                      <a:r>
+                        <a:rPr lang="en-US" sz="1000" dirty="0">
+                          <a:solidFill>
+                            <a:srgbClr val="2C2E82"/>
+                          </a:solidFill>
+                        </a:rPr>
                         <a:t>[City], [Country Abbr.]</a:t>
                       </a:r>
-                      <a:endParaRPr lang="en-GB" sz="800" dirty="0"/>
+                      <a:endParaRPr lang="en-GB" sz="1200" dirty="0"/>
                     </a:p>
                   </a:txBody>
                   <a:tcPr marT="0" marB="0" anchor="ctr">
@@ -3743,7 +3828,92 @@
                 </a:tc>
                 <a:extLst>
                   <a:ext uri="{0D108BD9-81ED-4DB2-BD59-A6C34878D82A}">
-                    <a16:rowId xmlns:a16="http://schemas.microsoft.com/office/drawing/2014/main" val="1979948562"/>
+                    <a16:rowId xmlns:a16="http://schemas.microsoft.com/office/drawing/2014/main" val="875048262"/>
+                  </a:ext>
+                </a:extLst>
+              </a:tr>
+              <a:tr h="308653">
+                <a:tc>
+                  <a:txBody>
+                    <a:bodyPr/>
+                    <a:lstStyle/>
+                    <a:p>
+                      <a:r>
+                        <a:rPr lang="en-US" sz="1000" dirty="0">
+                          <a:solidFill>
+                            <a:srgbClr val="2C2E82"/>
+                          </a:solidFill>
+                        </a:rPr>
+                        <a:t>[Role Title]</a:t>
+                      </a:r>
+                      <a:endParaRPr lang="en-GB" sz="1200" dirty="0"/>
+                    </a:p>
+                  </a:txBody>
+                  <a:tcPr marT="0" marB="0" anchor="ctr">
+                    <a:noFill/>
+                  </a:tcPr>
+                </a:tc>
+                <a:tc>
+                  <a:txBody>
+                    <a:bodyPr/>
+                    <a:lstStyle/>
+                    <a:p>
+                      <a:pPr algn="ctr"/>
+                      <a:r>
+                        <a:rPr lang="en-US" sz="1000" dirty="0">
+                          <a:solidFill>
+                            <a:srgbClr val="2C2E82"/>
+                          </a:solidFill>
+                        </a:rPr>
+                        <a:t>[Logo]</a:t>
+                      </a:r>
+                      <a:endParaRPr lang="en-GB" sz="1400" dirty="0"/>
+                    </a:p>
+                  </a:txBody>
+                  <a:tcPr marT="0" marB="0" anchor="ctr">
+                    <a:noFill/>
+                  </a:tcPr>
+                </a:tc>
+                <a:tc>
+                  <a:txBody>
+                    <a:bodyPr/>
+                    <a:lstStyle/>
+                    <a:p>
+                      <a:pPr marL="0" marR="0" lvl="0" indent="0" algn="l" defTabSz="914400" rtl="0" eaLnBrk="1" fontAlgn="auto" latinLnBrk="0" hangingPunct="1">
+                        <a:lnSpc>
+                          <a:spcPct val="100000"/>
+                        </a:lnSpc>
+                        <a:spcBef>
+                          <a:spcPts val="0"/>
+                        </a:spcBef>
+                        <a:spcAft>
+                          <a:spcPts val="0"/>
+                        </a:spcAft>
+                        <a:buClrTx/>
+                        <a:buSzTx/>
+                        <a:buFontTx/>
+                        <a:buNone/>
+                        <a:tabLst/>
+                        <a:defRPr/>
+                      </a:pPr>
+                      <a:r>
+                        <a:rPr lang="en-US" sz="1000" dirty="0">
+                          <a:solidFill>
+                            <a:srgbClr val="2C2E82"/>
+                          </a:solidFill>
+                        </a:rPr>
+                        <a:t>[City], [Country Abbr.]</a:t>
+                      </a:r>
+                      <a:endParaRPr lang="en-GB" sz="800" dirty="0"/>
+                    </a:p>
+                  </a:txBody>
+                  <a:tcPr marT="0" marB="0" anchor="ctr">
+                    <a:noFill/>
+                  </a:tcPr>
+                </a:tc>
+                <a:extLst>
+                  <a:ext uri="{0D108BD9-81ED-4DB2-BD59-A6C34878D82A}">
+                    <a16:rowId xmlns:a16="http://schemas.microsoft.com/office/drawing/2014/main" val="2538150282"/>
                   </a:ext>
                 </a:extLst>
               </a:tr>
@@ -3810,7 +3980,7 @@
                     <a:bodyPr/>
                     <a:lstStyle/>
                     <a:p>
-                      <a:pPr algn="ctr"/>
+                      <a:pPr algn="l"/>
                       <a:r>
                         <a:rPr lang="en-US" sz="1000" dirty="0">
                           <a:solidFill>
@@ -3828,7 +3998,7 @@
                 </a:tc>
                 <a:extLst>
                   <a:ext uri="{0D108BD9-81ED-4DB2-BD59-A6C34878D82A}">
-                    <a16:rowId xmlns:a16="http://schemas.microsoft.com/office/drawing/2014/main" val="875048262"/>
+                    <a16:rowId xmlns:a16="http://schemas.microsoft.com/office/drawing/2014/main" val="2043059878"/>
                   </a:ext>
                 </a:extLst>
               </a:tr>
@@ -3868,6 +4038,70 @@
                         <a:t>[Logo]</a:t>
                       </a:r>
                       <a:endParaRPr lang="en-GB" sz="1400" dirty="0"/>
+                    </a:p>
+                  </a:txBody>
+                  <a:tcPr marT="0" marB="0" anchor="ctr">
+                    <a:noFill/>
+                  </a:tcPr>
+                </a:tc>
+                <a:tc>
+                  <a:txBody>
+                    <a:bodyPr/>
+                    <a:lstStyle/>
+                    <a:p>
+                      <a:pPr marL="0" marR="0" lvl="0" indent="0" algn="l" defTabSz="914400" rtl="0" eaLnBrk="1" fontAlgn="auto" latinLnBrk="0" hangingPunct="1">
+                        <a:lnSpc>
+                          <a:spcPct val="100000"/>
+                        </a:lnSpc>
+                        <a:spcBef>
+                          <a:spcPts val="0"/>
+                        </a:spcBef>
+                        <a:spcAft>
+                          <a:spcPts val="0"/>
+                        </a:spcAft>
+                        <a:buClrTx/>
+                        <a:buSzTx/>
+                        <a:buFontTx/>
+                        <a:buNone/>
+                        <a:tabLst/>
+                        <a:defRPr/>
+                      </a:pPr>
+                      <a:r>
+                        <a:rPr lang="en-US" sz="1000" dirty="0">
+                          <a:solidFill>
+                            <a:srgbClr val="2C2E82"/>
+                          </a:solidFill>
+                        </a:rPr>
+                        <a:t>[City], [Country Abbr.]</a:t>
+                      </a:r>
+                      <a:endParaRPr lang="en-GB" sz="800" dirty="0"/>
+                    </a:p>
+                  </a:txBody>
+                  <a:tcPr marT="0" marB="0" anchor="ctr">
+                    <a:noFill/>
+                  </a:tcPr>
+                </a:tc>
+                <a:extLst>
+                  <a:ext uri="{0D108BD9-81ED-4DB2-BD59-A6C34878D82A}">
+                    <a16:rowId xmlns:a16="http://schemas.microsoft.com/office/drawing/2014/main" val="3366287691"/>
+                  </a:ext>
+                </a:extLst>
+              </a:tr>
+              <a:tr h="308653">
+                <a:tc>
+                  <a:txBody>
+                    <a:bodyPr/>
+                    <a:lstStyle/>
+                    <a:p>
+                      <a:r>
+                        <a:rPr lang="en-US" sz="1000" dirty="0">
+                          <a:solidFill>
+                            <a:srgbClr val="2C2E82"/>
+                          </a:solidFill>
+                        </a:rPr>
+                        <a:t>[Role Title]</a:t>
+                      </a:r>
+                      <a:endParaRPr lang="en-GB" sz="1200" dirty="0"/>
                     </a:p>
                   </a:txBody>
                   <a:tcPr marT="0" marB="0" anchor="ctr">
@@ -3902,9 +4136,30 @@
                             <a:srgbClr val="2C2E82"/>
                           </a:solidFill>
                         </a:rPr>
+                        <a:t>[Logo]</a:t>
+                      </a:r>
+                      <a:endParaRPr lang="en-GB" sz="1400" dirty="0"/>
+                    </a:p>
+                  </a:txBody>
+                  <a:tcPr marT="0" marB="0" anchor="ctr">
+                    <a:noFill/>
+                  </a:tcPr>
+                </a:tc>
+                <a:tc>
+                  <a:txBody>
+                    <a:bodyPr/>
+                    <a:lstStyle/>
+                    <a:p>
+                      <a:pPr algn="l"/>
+                      <a:r>
+                        <a:rPr lang="en-US" sz="1000" dirty="0">
+                          <a:solidFill>
+                            <a:srgbClr val="2C2E82"/>
+                          </a:solidFill>
+                        </a:rPr>
                         <a:t>[City], [Country Abbr.]</a:t>
                       </a:r>
-                      <a:endParaRPr lang="en-GB" sz="800" dirty="0"/>
+                      <a:endParaRPr lang="en-GB" sz="1200" dirty="0"/>
                     </a:p>
                   </a:txBody>
                   <a:tcPr marT="0" marB="0" anchor="ctr">
@@ -3913,7 +4168,92 @@
                 </a:tc>
                 <a:extLst>
                   <a:ext uri="{0D108BD9-81ED-4DB2-BD59-A6C34878D82A}">
-                    <a16:rowId xmlns:a16="http://schemas.microsoft.com/office/drawing/2014/main" val="2538150282"/>
+                    <a16:rowId xmlns:a16="http://schemas.microsoft.com/office/drawing/2014/main" val="4236833438"/>
+                  </a:ext>
+                </a:extLst>
+              </a:tr>
+              <a:tr h="308653">
+                <a:tc>
+                  <a:txBody>
+                    <a:bodyPr/>
+                    <a:lstStyle/>
+                    <a:p>
+                      <a:r>
+                        <a:rPr lang="en-US" sz="1000" dirty="0">
+                          <a:solidFill>
+                            <a:srgbClr val="2C2E82"/>
+                          </a:solidFill>
+                        </a:rPr>
+                        <a:t>[Role Title]</a:t>
+                      </a:r>
+                      <a:endParaRPr lang="en-GB" sz="1200" dirty="0"/>
+                    </a:p>
+                  </a:txBody>
+                  <a:tcPr marT="0" marB="0" anchor="ctr">
+                    <a:noFill/>
+                  </a:tcPr>
+                </a:tc>
+                <a:tc>
+                  <a:txBody>
+                    <a:bodyPr/>
+                    <a:lstStyle/>
+                    <a:p>
+                      <a:pPr algn="ctr"/>
+                      <a:r>
+                        <a:rPr lang="en-US" sz="1000" dirty="0">
+                          <a:solidFill>
+                            <a:srgbClr val="2C2E82"/>
+                          </a:solidFill>
+                        </a:rPr>
+                        <a:t>[Logo]</a:t>
+                      </a:r>
+                      <a:endParaRPr lang="en-GB" sz="1400" dirty="0"/>
+                    </a:p>
+                  </a:txBody>
+                  <a:tcPr marT="0" marB="0" anchor="ctr">
+                    <a:noFill/>
+                  </a:tcPr>
+                </a:tc>
+                <a:tc>
+                  <a:txBody>
+                    <a:bodyPr/>
+                    <a:lstStyle/>
+                    <a:p>
+                      <a:pPr marL="0" marR="0" lvl="0" indent="0" algn="l" defTabSz="914400" rtl="0" eaLnBrk="1" fontAlgn="auto" latinLnBrk="0" hangingPunct="1">
+                        <a:lnSpc>
+                          <a:spcPct val="100000"/>
+                        </a:lnSpc>
+                        <a:spcBef>
+                          <a:spcPts val="0"/>
+                        </a:spcBef>
+                        <a:spcAft>
+                          <a:spcPts val="0"/>
+                        </a:spcAft>
+                        <a:buClrTx/>
+                        <a:buSzTx/>
+                        <a:buFontTx/>
+                        <a:buNone/>
+                        <a:tabLst/>
+                        <a:defRPr/>
+                      </a:pPr>
+                      <a:r>
+                        <a:rPr lang="en-US" sz="1000" dirty="0">
+                          <a:solidFill>
+                            <a:srgbClr val="2C2E82"/>
+                          </a:solidFill>
+                        </a:rPr>
+                        <a:t>[City], [Country Abbr.]</a:t>
+                      </a:r>
+                      <a:endParaRPr lang="en-GB" sz="800" dirty="0"/>
+                    </a:p>
+                  </a:txBody>
+                  <a:tcPr marT="0" marB="0" anchor="ctr">
+                    <a:noFill/>
+                  </a:tcPr>
+                </a:tc>
+                <a:extLst>
+                  <a:ext uri="{0D108BD9-81ED-4DB2-BD59-A6C34878D82A}">
+                    <a16:rowId xmlns:a16="http://schemas.microsoft.com/office/drawing/2014/main" val="2211659264"/>
                   </a:ext>
                 </a:extLst>
               </a:tr>
@@ -3980,7 +4320,7 @@
                     <a:bodyPr/>
                     <a:lstStyle/>
                     <a:p>
-                      <a:pPr algn="ctr"/>
+                      <a:pPr algn="l"/>
                       <a:r>
                         <a:rPr lang="en-US" sz="1000" dirty="0">
                           <a:solidFill>
@@ -3998,7 +4338,7 @@
                 </a:tc>
                 <a:extLst>
                   <a:ext uri="{0D108BD9-81ED-4DB2-BD59-A6C34878D82A}">
-                    <a16:rowId xmlns:a16="http://schemas.microsoft.com/office/drawing/2014/main" val="2043059878"/>
+                    <a16:rowId xmlns:a16="http://schemas.microsoft.com/office/drawing/2014/main" val="2569898499"/>
                   </a:ext>
                 </a:extLst>
               </a:tr>
@@ -4038,6 +4378,70 @@
                         <a:t>[Logo]</a:t>
                       </a:r>
                       <a:endParaRPr lang="en-GB" sz="1400" dirty="0"/>
+                    </a:p>
+                  </a:txBody>
+                  <a:tcPr marT="0" marB="0" anchor="ctr">
+                    <a:noFill/>
+                  </a:tcPr>
+                </a:tc>
+                <a:tc>
+                  <a:txBody>
+                    <a:bodyPr/>
+                    <a:lstStyle/>
+                    <a:p>
+                      <a:pPr marL="0" marR="0" lvl="0" indent="0" algn="l" defTabSz="914400" rtl="0" eaLnBrk="1" fontAlgn="auto" latinLnBrk="0" hangingPunct="1">
+                        <a:lnSpc>
+                          <a:spcPct val="100000"/>
+                        </a:lnSpc>
+                        <a:spcBef>
+                          <a:spcPts val="0"/>
+                        </a:spcBef>
+                        <a:spcAft>
+                          <a:spcPts val="0"/>
+                        </a:spcAft>
+                        <a:buClrTx/>
+                        <a:buSzTx/>
+                        <a:buFontTx/>
+                        <a:buNone/>
+                        <a:tabLst/>
+                        <a:defRPr/>
+                      </a:pPr>
+                      <a:r>
+                        <a:rPr lang="en-US" sz="1000" dirty="0">
+                          <a:solidFill>
+                            <a:srgbClr val="2C2E82"/>
+                          </a:solidFill>
+                        </a:rPr>
+                        <a:t>[City], [Country Abbr.]</a:t>
+                      </a:r>
+                      <a:endParaRPr lang="en-GB" sz="800" dirty="0"/>
+                    </a:p>
+                  </a:txBody>
+                  <a:tcPr marT="0" marB="0" anchor="ctr">
+                    <a:noFill/>
+                  </a:tcPr>
+                </a:tc>
+                <a:extLst>
+                  <a:ext uri="{0D108BD9-81ED-4DB2-BD59-A6C34878D82A}">
+                    <a16:rowId xmlns:a16="http://schemas.microsoft.com/office/drawing/2014/main" val="2928358824"/>
+                  </a:ext>
+                </a:extLst>
+              </a:tr>
+              <a:tr h="308653">
+                <a:tc>
+                  <a:txBody>
+                    <a:bodyPr/>
+                    <a:lstStyle/>
+                    <a:p>
+                      <a:r>
+                        <a:rPr lang="en-US" sz="1000" dirty="0">
+                          <a:solidFill>
+                            <a:srgbClr val="2C2E82"/>
+                          </a:solidFill>
+                        </a:rPr>
+                        <a:t>[Role Title]</a:t>
+                      </a:r>
+                      <a:endParaRPr lang="en-GB" sz="1200" dirty="0"/>
                     </a:p>
                   </a:txBody>
                   <a:tcPr marT="0" marB="0" anchor="ctr">
@@ -4072,9 +4476,30 @@
                             <a:srgbClr val="2C2E82"/>
                           </a:solidFill>
                         </a:rPr>
+                        <a:t>[Logo]</a:t>
+                      </a:r>
+                      <a:endParaRPr lang="en-GB" sz="1400" dirty="0"/>
+                    </a:p>
+                  </a:txBody>
+                  <a:tcPr marT="0" marB="0" anchor="ctr">
+                    <a:noFill/>
+                  </a:tcPr>
+                </a:tc>
+                <a:tc>
+                  <a:txBody>
+                    <a:bodyPr/>
+                    <a:lstStyle/>
+                    <a:p>
+                      <a:pPr algn="l"/>
+                      <a:r>
+                        <a:rPr lang="en-US" sz="1000" dirty="0">
+                          <a:solidFill>
+                            <a:srgbClr val="2C2E82"/>
+                          </a:solidFill>
+                        </a:rPr>
                         <a:t>[City], [Country Abbr.]</a:t>
                       </a:r>
-                      <a:endParaRPr lang="en-GB" sz="800" dirty="0"/>
+                      <a:endParaRPr lang="en-GB" sz="1200" dirty="0"/>
                     </a:p>
                   </a:txBody>
                   <a:tcPr marT="0" marB="0" anchor="ctr">
@@ -4083,7 +4508,92 @@
                 </a:tc>
                 <a:extLst>
                   <a:ext uri="{0D108BD9-81ED-4DB2-BD59-A6C34878D82A}">
-                    <a16:rowId xmlns:a16="http://schemas.microsoft.com/office/drawing/2014/main" val="3366287691"/>
+                    <a16:rowId xmlns:a16="http://schemas.microsoft.com/office/drawing/2014/main" val="2485488683"/>
+                  </a:ext>
+                </a:extLst>
+              </a:tr>
+              <a:tr h="308653">
+                <a:tc>
+                  <a:txBody>
+                    <a:bodyPr/>
+                    <a:lstStyle/>
+                    <a:p>
+                      <a:r>
+                        <a:rPr lang="en-US" sz="1000" dirty="0">
+                          <a:solidFill>
+                            <a:srgbClr val="2C2E82"/>
+                          </a:solidFill>
+                        </a:rPr>
+                        <a:t>[Role Title]</a:t>
+                      </a:r>
+                      <a:endParaRPr lang="en-GB" sz="1200" dirty="0"/>
+                    </a:p>
+                  </a:txBody>
+                  <a:tcPr marT="0" marB="0" anchor="ctr">
+                    <a:noFill/>
+                  </a:tcPr>
+                </a:tc>
+                <a:tc>
+                  <a:txBody>
+                    <a:bodyPr/>
+                    <a:lstStyle/>
+                    <a:p>
+                      <a:pPr algn="ctr"/>
+                      <a:r>
+                        <a:rPr lang="en-US" sz="1000" dirty="0">
+                          <a:solidFill>
+                            <a:srgbClr val="2C2E82"/>
+                          </a:solidFill>
+                        </a:rPr>
+                        <a:t>[Logo]</a:t>
+                      </a:r>
+                      <a:endParaRPr lang="en-GB" sz="1400" dirty="0"/>
+                    </a:p>
+                  </a:txBody>
+                  <a:tcPr marT="0" marB="0" anchor="ctr">
+                    <a:noFill/>
+                  </a:tcPr>
+                </a:tc>
+                <a:tc>
+                  <a:txBody>
+                    <a:bodyPr/>
+                    <a:lstStyle/>
+                    <a:p>
+                      <a:pPr marL="0" marR="0" lvl="0" indent="0" algn="l" defTabSz="914400" rtl="0" eaLnBrk="1" fontAlgn="auto" latinLnBrk="0" hangingPunct="1">
+                        <a:lnSpc>
+                          <a:spcPct val="100000"/>
+                        </a:lnSpc>
+                        <a:spcBef>
+                          <a:spcPts val="0"/>
+                        </a:spcBef>
+                        <a:spcAft>
+                          <a:spcPts val="0"/>
+                        </a:spcAft>
+                        <a:buClrTx/>
+                        <a:buSzTx/>
+                        <a:buFontTx/>
+                        <a:buNone/>
+                        <a:tabLst/>
+                        <a:defRPr/>
+                      </a:pPr>
+                      <a:r>
+                        <a:rPr lang="en-US" sz="1000" dirty="0">
+                          <a:solidFill>
+                            <a:srgbClr val="2C2E82"/>
+                          </a:solidFill>
+                        </a:rPr>
+                        <a:t>[City], [Country Abbr.]</a:t>
+                      </a:r>
+                      <a:endParaRPr lang="en-GB" sz="800" dirty="0"/>
+                    </a:p>
+                  </a:txBody>
+                  <a:tcPr marT="0" marB="0" anchor="ctr">
+                    <a:noFill/>
+                  </a:tcPr>
+                </a:tc>
+                <a:extLst>
+                  <a:ext uri="{0D108BD9-81ED-4DB2-BD59-A6C34878D82A}">
+                    <a16:rowId xmlns:a16="http://schemas.microsoft.com/office/drawing/2014/main" val="3925639905"/>
                   </a:ext>
                 </a:extLst>
               </a:tr>
@@ -4150,517 +4660,7 @@
                     <a:bodyPr/>
                     <a:lstStyle/>
                     <a:p>
-                      <a:pPr algn="ctr"/>
-                      <a:r>
-                        <a:rPr lang="en-US" sz="1000" dirty="0">
-                          <a:solidFill>
-                            <a:srgbClr val="2C2E82"/>
-                          </a:solidFill>
-                        </a:rPr>
-                        <a:t>[City], [Country Abbr.]</a:t>
-                      </a:r>
-                      <a:endParaRPr lang="en-GB" sz="1200" dirty="0"/>
-                    </a:p>
-                  </a:txBody>
-                  <a:tcPr marT="0" marB="0" anchor="ctr">
-                    <a:noFill/>
-                  </a:tcPr>
-                </a:tc>
-                <a:extLst>
-                  <a:ext uri="{0D108BD9-81ED-4DB2-BD59-A6C34878D82A}">
-                    <a16:rowId xmlns:a16="http://schemas.microsoft.com/office/drawing/2014/main" val="4236833438"/>
-                  </a:ext>
-                </a:extLst>
-              </a:tr>
-              <a:tr h="308653">
-                <a:tc>
-                  <a:txBody>
-                    <a:bodyPr/>
-                    <a:lstStyle/>
-                    <a:p>
-                      <a:r>
-                        <a:rPr lang="en-US" sz="1000" dirty="0">
-                          <a:solidFill>
-                            <a:srgbClr val="2C2E82"/>
-                          </a:solidFill>
-                        </a:rPr>
-                        <a:t>[Role Title]</a:t>
-                      </a:r>
-                      <a:endParaRPr lang="en-GB" sz="1200" dirty="0"/>
-                    </a:p>
-                  </a:txBody>
-                  <a:tcPr marT="0" marB="0" anchor="ctr">
-                    <a:noFill/>
-                  </a:tcPr>
-                </a:tc>
-                <a:tc>
-                  <a:txBody>
-                    <a:bodyPr/>
-                    <a:lstStyle/>
-                    <a:p>
-                      <a:pPr algn="ctr"/>
-                      <a:r>
-                        <a:rPr lang="en-US" sz="1000" dirty="0">
-                          <a:solidFill>
-                            <a:srgbClr val="2C2E82"/>
-                          </a:solidFill>
-                        </a:rPr>
-                        <a:t>[Logo]</a:t>
-                      </a:r>
-                      <a:endParaRPr lang="en-GB" sz="1400" dirty="0"/>
-                    </a:p>
-                  </a:txBody>
-                  <a:tcPr marT="0" marB="0" anchor="ctr">
-                    <a:noFill/>
-                  </a:tcPr>
-                </a:tc>
-                <a:tc>
-                  <a:txBody>
-                    <a:bodyPr/>
-                    <a:lstStyle/>
-                    <a:p>
-                      <a:pPr marL="0" marR="0" lvl="0" indent="0" algn="ctr" defTabSz="914400" rtl="0" eaLnBrk="1" fontAlgn="auto" latinLnBrk="0" hangingPunct="1">
-                        <a:lnSpc>
-                          <a:spcPct val="100000"/>
-                        </a:lnSpc>
-                        <a:spcBef>
-                          <a:spcPts val="0"/>
-                        </a:spcBef>
-                        <a:spcAft>
-                          <a:spcPts val="0"/>
-                        </a:spcAft>
-                        <a:buClrTx/>
-                        <a:buSzTx/>
-                        <a:buFontTx/>
-                        <a:buNone/>
-                        <a:tabLst/>
-                        <a:defRPr/>
-                      </a:pPr>
-                      <a:r>
-                        <a:rPr lang="en-US" sz="1000" dirty="0">
-                          <a:solidFill>
-                            <a:srgbClr val="2C2E82"/>
-                          </a:solidFill>
-                        </a:rPr>
-                        <a:t>[City], [Country Abbr.]</a:t>
-                      </a:r>
-                      <a:endParaRPr lang="en-GB" sz="800" dirty="0"/>
-                    </a:p>
-                  </a:txBody>
-                  <a:tcPr marT="0" marB="0" anchor="ctr">
-                    <a:noFill/>
-                  </a:tcPr>
-                </a:tc>
-                <a:extLst>
-                  <a:ext uri="{0D108BD9-81ED-4DB2-BD59-A6C34878D82A}">
-                    <a16:rowId xmlns:a16="http://schemas.microsoft.com/office/drawing/2014/main" val="2211659264"/>
-                  </a:ext>
-                </a:extLst>
-              </a:tr>
-              <a:tr h="308653">
-                <a:tc>
-                  <a:txBody>
-                    <a:bodyPr/>
-                    <a:lstStyle/>
-                    <a:p>
-                      <a:r>
-                        <a:rPr lang="en-US" sz="1000" dirty="0">
-                          <a:solidFill>
-                            <a:srgbClr val="2C2E82"/>
-                          </a:solidFill>
-                        </a:rPr>
-                        <a:t>[Role Title]</a:t>
-                      </a:r>
-                      <a:endParaRPr lang="en-GB" sz="1200" dirty="0"/>
-                    </a:p>
-                  </a:txBody>
-                  <a:tcPr marT="0" marB="0" anchor="ctr">
-                    <a:noFill/>
-                  </a:tcPr>
-                </a:tc>
-                <a:tc>
-                  <a:txBody>
-                    <a:bodyPr/>
-                    <a:lstStyle/>
-                    <a:p>
-                      <a:pPr marL="0" marR="0" lvl="0" indent="0" algn="ctr" defTabSz="914400" rtl="0" eaLnBrk="1" fontAlgn="auto" latinLnBrk="0" hangingPunct="1">
-                        <a:lnSpc>
-                          <a:spcPct val="100000"/>
-                        </a:lnSpc>
-                        <a:spcBef>
-                          <a:spcPts val="0"/>
-                        </a:spcBef>
-                        <a:spcAft>
-                          <a:spcPts val="0"/>
-                        </a:spcAft>
-                        <a:buClrTx/>
-                        <a:buSzTx/>
-                        <a:buFontTx/>
-                        <a:buNone/>
-                        <a:tabLst/>
-                        <a:defRPr/>
-                      </a:pPr>
-                      <a:r>
-                        <a:rPr lang="en-US" sz="1000" dirty="0">
-                          <a:solidFill>
-                            <a:srgbClr val="2C2E82"/>
-                          </a:solidFill>
-                        </a:rPr>
-                        <a:t>[Logo]</a:t>
-                      </a:r>
-                      <a:endParaRPr lang="en-GB" sz="1400" dirty="0"/>
-                    </a:p>
-                  </a:txBody>
-                  <a:tcPr marT="0" marB="0" anchor="ctr">
-                    <a:noFill/>
-                  </a:tcPr>
-                </a:tc>
-                <a:tc>
-                  <a:txBody>
-                    <a:bodyPr/>
-                    <a:lstStyle/>
-                    <a:p>
-                      <a:pPr algn="ctr"/>
-                      <a:r>
-                        <a:rPr lang="en-US" sz="1000" dirty="0">
-                          <a:solidFill>
-                            <a:srgbClr val="2C2E82"/>
-                          </a:solidFill>
-                        </a:rPr>
-                        <a:t>[City], [Country Abbr.]</a:t>
-                      </a:r>
-                      <a:endParaRPr lang="en-GB" sz="1200" dirty="0"/>
-                    </a:p>
-                  </a:txBody>
-                  <a:tcPr marT="0" marB="0" anchor="ctr">
-                    <a:noFill/>
-                  </a:tcPr>
-                </a:tc>
-                <a:extLst>
-                  <a:ext uri="{0D108BD9-81ED-4DB2-BD59-A6C34878D82A}">
-                    <a16:rowId xmlns:a16="http://schemas.microsoft.com/office/drawing/2014/main" val="2569898499"/>
-                  </a:ext>
-                </a:extLst>
-              </a:tr>
-              <a:tr h="308653">
-                <a:tc>
-                  <a:txBody>
-                    <a:bodyPr/>
-                    <a:lstStyle/>
-                    <a:p>
-                      <a:r>
-                        <a:rPr lang="en-US" sz="1000" dirty="0">
-                          <a:solidFill>
-                            <a:srgbClr val="2C2E82"/>
-                          </a:solidFill>
-                        </a:rPr>
-                        <a:t>[Role Title]</a:t>
-                      </a:r>
-                      <a:endParaRPr lang="en-GB" sz="1200" dirty="0"/>
-                    </a:p>
-                  </a:txBody>
-                  <a:tcPr marT="0" marB="0" anchor="ctr">
-                    <a:noFill/>
-                  </a:tcPr>
-                </a:tc>
-                <a:tc>
-                  <a:txBody>
-                    <a:bodyPr/>
-                    <a:lstStyle/>
-                    <a:p>
-                      <a:pPr algn="ctr"/>
-                      <a:r>
-                        <a:rPr lang="en-US" sz="1000" dirty="0">
-                          <a:solidFill>
-                            <a:srgbClr val="2C2E82"/>
-                          </a:solidFill>
-                        </a:rPr>
-                        <a:t>[Logo]</a:t>
-                      </a:r>
-                      <a:endParaRPr lang="en-GB" sz="1400" dirty="0"/>
-                    </a:p>
-                  </a:txBody>
-                  <a:tcPr marT="0" marB="0" anchor="ctr">
-                    <a:noFill/>
-                  </a:tcPr>
-                </a:tc>
-                <a:tc>
-                  <a:txBody>
-                    <a:bodyPr/>
-                    <a:lstStyle/>
-                    <a:p>
-                      <a:pPr marL="0" marR="0" lvl="0" indent="0" algn="ctr" defTabSz="914400" rtl="0" eaLnBrk="1" fontAlgn="auto" latinLnBrk="0" hangingPunct="1">
-                        <a:lnSpc>
-                          <a:spcPct val="100000"/>
-                        </a:lnSpc>
-                        <a:spcBef>
-                          <a:spcPts val="0"/>
-                        </a:spcBef>
-                        <a:spcAft>
-                          <a:spcPts val="0"/>
-                        </a:spcAft>
-                        <a:buClrTx/>
-                        <a:buSzTx/>
-                        <a:buFontTx/>
-                        <a:buNone/>
-                        <a:tabLst/>
-                        <a:defRPr/>
-                      </a:pPr>
-                      <a:r>
-                        <a:rPr lang="en-US" sz="1000" dirty="0">
-                          <a:solidFill>
-                            <a:srgbClr val="2C2E82"/>
-                          </a:solidFill>
-                        </a:rPr>
-                        <a:t>[City], [Country Abbr.]</a:t>
-                      </a:r>
-                      <a:endParaRPr lang="en-GB" sz="800" dirty="0"/>
-                    </a:p>
-                  </a:txBody>
-                  <a:tcPr marT="0" marB="0" anchor="ctr">
-                    <a:noFill/>
-                  </a:tcPr>
-                </a:tc>
-                <a:extLst>
-                  <a:ext uri="{0D108BD9-81ED-4DB2-BD59-A6C34878D82A}">
-                    <a16:rowId xmlns:a16="http://schemas.microsoft.com/office/drawing/2014/main" val="2928358824"/>
-                  </a:ext>
-                </a:extLst>
-              </a:tr>
-              <a:tr h="308653">
-                <a:tc>
-                  <a:txBody>
-                    <a:bodyPr/>
-                    <a:lstStyle/>
-                    <a:p>
-                      <a:r>
-                        <a:rPr lang="en-US" sz="1000" dirty="0">
-                          <a:solidFill>
-                            <a:srgbClr val="2C2E82"/>
-                          </a:solidFill>
-                        </a:rPr>
-                        <a:t>[Role Title]</a:t>
-                      </a:r>
-                      <a:endParaRPr lang="en-GB" sz="1200" dirty="0"/>
-                    </a:p>
-                  </a:txBody>
-                  <a:tcPr marT="0" marB="0" anchor="ctr">
-                    <a:noFill/>
-                  </a:tcPr>
-                </a:tc>
-                <a:tc>
-                  <a:txBody>
-                    <a:bodyPr/>
-                    <a:lstStyle/>
-                    <a:p>
-                      <a:pPr marL="0" marR="0" lvl="0" indent="0" algn="ctr" defTabSz="914400" rtl="0" eaLnBrk="1" fontAlgn="auto" latinLnBrk="0" hangingPunct="1">
-                        <a:lnSpc>
-                          <a:spcPct val="100000"/>
-                        </a:lnSpc>
-                        <a:spcBef>
-                          <a:spcPts val="0"/>
-                        </a:spcBef>
-                        <a:spcAft>
-                          <a:spcPts val="0"/>
-                        </a:spcAft>
-                        <a:buClrTx/>
-                        <a:buSzTx/>
-                        <a:buFontTx/>
-                        <a:buNone/>
-                        <a:tabLst/>
-                        <a:defRPr/>
-                      </a:pPr>
-                      <a:r>
-                        <a:rPr lang="en-US" sz="1000" dirty="0">
-                          <a:solidFill>
-                            <a:srgbClr val="2C2E82"/>
-                          </a:solidFill>
-                        </a:rPr>
-                        <a:t>[Logo]</a:t>
-                      </a:r>
-                      <a:endParaRPr lang="en-GB" sz="1400" dirty="0"/>
-                    </a:p>
-                  </a:txBody>
-                  <a:tcPr marT="0" marB="0" anchor="ctr">
-                    <a:noFill/>
-                  </a:tcPr>
-                </a:tc>
-                <a:tc>
-                  <a:txBody>
-                    <a:bodyPr/>
-                    <a:lstStyle/>
-                    <a:p>
-                      <a:pPr algn="ctr"/>
-                      <a:r>
-                        <a:rPr lang="en-US" sz="1000" dirty="0">
-                          <a:solidFill>
-                            <a:srgbClr val="2C2E82"/>
-                          </a:solidFill>
-                        </a:rPr>
-                        <a:t>[City], [Country Abbr.]</a:t>
-                      </a:r>
-                      <a:endParaRPr lang="en-GB" sz="1200" dirty="0"/>
-                    </a:p>
-                  </a:txBody>
-                  <a:tcPr marT="0" marB="0" anchor="ctr">
-                    <a:noFill/>
-                  </a:tcPr>
-                </a:tc>
-                <a:extLst>
-                  <a:ext uri="{0D108BD9-81ED-4DB2-BD59-A6C34878D82A}">
-                    <a16:rowId xmlns:a16="http://schemas.microsoft.com/office/drawing/2014/main" val="2485488683"/>
-                  </a:ext>
-                </a:extLst>
-              </a:tr>
-              <a:tr h="308653">
-                <a:tc>
-                  <a:txBody>
-                    <a:bodyPr/>
-                    <a:lstStyle/>
-                    <a:p>
-                      <a:r>
-                        <a:rPr lang="en-US" sz="1000" dirty="0">
-                          <a:solidFill>
-                            <a:srgbClr val="2C2E82"/>
-                          </a:solidFill>
-                        </a:rPr>
-                        <a:t>[Role Title]</a:t>
-                      </a:r>
-                      <a:endParaRPr lang="en-GB" sz="1200" dirty="0"/>
-                    </a:p>
-                  </a:txBody>
-                  <a:tcPr marT="0" marB="0" anchor="ctr">
-                    <a:noFill/>
-                  </a:tcPr>
-                </a:tc>
-                <a:tc>
-                  <a:txBody>
-                    <a:bodyPr/>
-                    <a:lstStyle/>
-                    <a:p>
-                      <a:pPr algn="ctr"/>
-                      <a:r>
-                        <a:rPr lang="en-US" sz="1000" dirty="0">
-                          <a:solidFill>
-                            <a:srgbClr val="2C2E82"/>
-                          </a:solidFill>
-                        </a:rPr>
-                        <a:t>[Logo]</a:t>
-                      </a:r>
-                      <a:endParaRPr lang="en-GB" sz="1400" dirty="0"/>
-                    </a:p>
-                  </a:txBody>
-                  <a:tcPr marT="0" marB="0" anchor="ctr">
-                    <a:noFill/>
-                  </a:tcPr>
-                </a:tc>
-                <a:tc>
-                  <a:txBody>
-                    <a:bodyPr/>
-                    <a:lstStyle/>
-                    <a:p>
-                      <a:pPr marL="0" marR="0" lvl="0" indent="0" algn="ctr" defTabSz="914400" rtl="0" eaLnBrk="1" fontAlgn="auto" latinLnBrk="0" hangingPunct="1">
-                        <a:lnSpc>
-                          <a:spcPct val="100000"/>
-                        </a:lnSpc>
-                        <a:spcBef>
-                          <a:spcPts val="0"/>
-                        </a:spcBef>
-                        <a:spcAft>
-                          <a:spcPts val="0"/>
-                        </a:spcAft>
-                        <a:buClrTx/>
-                        <a:buSzTx/>
-                        <a:buFontTx/>
-                        <a:buNone/>
-                        <a:tabLst/>
-                        <a:defRPr/>
-                      </a:pPr>
-                      <a:r>
-                        <a:rPr lang="en-US" sz="1000" dirty="0">
-                          <a:solidFill>
-                            <a:srgbClr val="2C2E82"/>
-                          </a:solidFill>
-                        </a:rPr>
-                        <a:t>[City], [Country Abbr.]</a:t>
-                      </a:r>
-                      <a:endParaRPr lang="en-GB" sz="800" dirty="0"/>
-                    </a:p>
-                  </a:txBody>
-                  <a:tcPr marT="0" marB="0" anchor="ctr">
-                    <a:noFill/>
-                  </a:tcPr>
-                </a:tc>
-                <a:extLst>
-                  <a:ext uri="{0D108BD9-81ED-4DB2-BD59-A6C34878D82A}">
-                    <a16:rowId xmlns:a16="http://schemas.microsoft.com/office/drawing/2014/main" val="3925639905"/>
-                  </a:ext>
-                </a:extLst>
-              </a:tr>
-              <a:tr h="308653">
-                <a:tc>
-                  <a:txBody>
-                    <a:bodyPr/>
-                    <a:lstStyle/>
-                    <a:p>
-                      <a:r>
-                        <a:rPr lang="en-US" sz="1000" dirty="0">
-                          <a:solidFill>
-                            <a:srgbClr val="2C2E82"/>
-                          </a:solidFill>
-                        </a:rPr>
-                        <a:t>[Role Title]</a:t>
-                      </a:r>
-                      <a:endParaRPr lang="en-GB" sz="1200" dirty="0"/>
-                    </a:p>
-                  </a:txBody>
-                  <a:tcPr marT="0" marB="0" anchor="ctr">
-                    <a:noFill/>
-                  </a:tcPr>
-                </a:tc>
-                <a:tc>
-                  <a:txBody>
-                    <a:bodyPr/>
-                    <a:lstStyle/>
-                    <a:p>
-                      <a:pPr marL="0" marR="0" lvl="0" indent="0" algn="ctr" defTabSz="914400" rtl="0" eaLnBrk="1" fontAlgn="auto" latinLnBrk="0" hangingPunct="1">
-                        <a:lnSpc>
-                          <a:spcPct val="100000"/>
-                        </a:lnSpc>
-                        <a:spcBef>
-                          <a:spcPts val="0"/>
-                        </a:spcBef>
-                        <a:spcAft>
-                          <a:spcPts val="0"/>
-                        </a:spcAft>
-                        <a:buClrTx/>
-                        <a:buSzTx/>
-                        <a:buFontTx/>
-                        <a:buNone/>
-                        <a:tabLst/>
-                        <a:defRPr/>
-                      </a:pPr>
-                      <a:r>
-                        <a:rPr lang="en-US" sz="1000" dirty="0">
-                          <a:solidFill>
-                            <a:srgbClr val="2C2E82"/>
-                          </a:solidFill>
-                        </a:rPr>
-                        <a:t>[Logo]</a:t>
-                      </a:r>
-                      <a:endParaRPr lang="en-GB" sz="1400" dirty="0"/>
-                    </a:p>
-                  </a:txBody>
-                  <a:tcPr marT="0" marB="0" anchor="ctr">
-                    <a:noFill/>
-                  </a:tcPr>
-                </a:tc>
-                <a:tc>
-                  <a:txBody>
-                    <a:bodyPr/>
-                    <a:lstStyle/>
-                    <a:p>
-                      <a:pPr algn="ctr"/>
+                      <a:pPr algn="l"/>
                       <a:r>
                         <a:rPr lang="en-US" sz="1000" dirty="0">
                           <a:solidFill>
@@ -4729,7 +4729,7 @@
                     <a:bodyPr/>
                     <a:lstStyle/>
                     <a:p>
-                      <a:pPr marL="0" marR="0" lvl="0" indent="0" algn="ctr" defTabSz="914400" rtl="0" eaLnBrk="1" fontAlgn="auto" latinLnBrk="0" hangingPunct="1">
+                      <a:pPr marL="0" marR="0" lvl="0" indent="0" algn="l" defTabSz="914400" rtl="0" eaLnBrk="1" fontAlgn="auto" latinLnBrk="0" hangingPunct="1">
                         <a:lnSpc>
                           <a:spcPct val="100000"/>
                         </a:lnSpc>

--- a/templates/Track_Record_Logo_TEMPLATE.pptx
+++ b/templates/Track_Record_Logo_TEMPLATE.pptx
@@ -289,7 +289,7 @@
           <a:p>
             <a:fld id="{AF9124C0-B47C-2D4D-B7DA-E1D6FCB07920}" type="datetimeFigureOut">
               <a:rPr lang="en-US" smtClean="0"/>
-              <a:t>7/23/2026</a:t>
+              <a:t>8/31/2026</a:t>
             </a:fld>
             <a:endParaRPr lang="en-US"/>
           </a:p>
@@ -466,7 +466,7 @@
           <a:p>
             <a:fld id="{4672F554-F5A9-ED4C-BC96-1B154D77C3BA}" type="datetimeFigureOut">
               <a:rPr lang="en-US" smtClean="0"/>
-              <a:t>7/23/2026</a:t>
+              <a:t>8/31/2026</a:t>
             </a:fld>
             <a:endParaRPr lang="en-US"/>
           </a:p>
@@ -1950,14 +1950,14 @@
           <p:nvPr>
             <p:extLst>
               <p:ext uri="{D42A27DB-BD31-4B8C-83A1-F6EECF244321}">
-                <p14:modId xmlns:p14="http://schemas.microsoft.com/office/powerpoint/2010/main" val="510571279"/>
+                <p14:modId xmlns:p14="http://schemas.microsoft.com/office/powerpoint/2010/main" val="1451964741"/>
               </p:ext>
             </p:extLst>
           </p:nvPr>
         </p:nvGraphicFramePr>
         <p:xfrm>
           <a:off x="538872" y="1051560"/>
-          <a:ext cx="5368152" cy="4801142"/>
+          <a:ext cx="5368152" cy="5095022"/>
         </p:xfrm>
         <a:graphic>
           <a:graphicData uri="http://schemas.openxmlformats.org/drawingml/2006/table">
@@ -1996,7 +1996,7 @@
                     <a:p>
                       <a:pPr algn="ctr"/>
                       <a:r>
-                        <a:rPr lang="en-US" sz="1300" dirty="0" b="1">
+                        <a:rPr lang="en-US" sz="1300" b="1" dirty="0">
                           <a:solidFill>
                             <a:srgbClr val="FFFFFF"/>
                           </a:solidFill>
@@ -2006,7 +2006,7 @@
                       <a:endParaRPr lang="en-GB" sz="1200" dirty="0"/>
                     </a:p>
                   </a:txBody>
-                  <a:tcPr marL="91440" anchor="ctr">
+                  <a:tcPr anchor="ctr">
                     <a:solidFill>
                       <a:srgbClr val="1F2478"/>
                     </a:solidFill>
@@ -2044,7 +2044,7 @@
                   </a:ext>
                 </a:extLst>
               </a:tr>
-              <a:tr h="20000">
+              <a:tr h="0">
                 <a:tc gridSpan="3">
                   <a:txBody>
                     <a:bodyPr/>
@@ -2229,7 +2229,7 @@
                             <a:srgbClr val="2C2E82"/>
                           </a:solidFill>
                         </a:rPr>
-                        <a:t>[City], [Country Abbr.]</a:t>
+                        <a:t>   [City], [Country      Abbr.]</a:t>
                       </a:r>
                       <a:endParaRPr lang="en-GB" sz="1200" dirty="0"/>
                     </a:p>
@@ -2314,7 +2314,7 @@
                             <a:srgbClr val="2C2E82"/>
                           </a:solidFill>
                         </a:rPr>
-                        <a:t>[City], [Country Abbr.]</a:t>
+                        <a:t>   [City], [Country Abbr.]</a:t>
                       </a:r>
                       <a:endParaRPr lang="en-GB" sz="800" dirty="0"/>
                     </a:p>
@@ -2399,7 +2399,7 @@
                             <a:srgbClr val="2C2E82"/>
                           </a:solidFill>
                         </a:rPr>
-                        <a:t>[City], [Country Abbr.]</a:t>
+                        <a:t>   [City], [Country Abbr.]</a:t>
                       </a:r>
                       <a:endParaRPr lang="en-GB" sz="1200" dirty="0"/>
                     </a:p>
@@ -2484,7 +2484,7 @@
                             <a:srgbClr val="2C2E82"/>
                           </a:solidFill>
                         </a:rPr>
-                        <a:t>[City], [Country Abbr.]</a:t>
+                        <a:t>   [City], [Country Abbr.]</a:t>
                       </a:r>
                       <a:endParaRPr lang="en-GB" sz="800" dirty="0"/>
                     </a:p>
@@ -2569,7 +2569,7 @@
                             <a:srgbClr val="2C2E82"/>
                           </a:solidFill>
                         </a:rPr>
-                        <a:t>[City], [Country Abbr.]</a:t>
+                        <a:t>   [City], [Country Abbr.]</a:t>
                       </a:r>
                       <a:endParaRPr lang="en-GB" sz="1200" dirty="0"/>
                     </a:p>
@@ -2654,7 +2654,7 @@
                             <a:srgbClr val="2C2E82"/>
                           </a:solidFill>
                         </a:rPr>
-                        <a:t>[City], [Country Abbr.]</a:t>
+                        <a:t>   [City], [Country Abbr.]</a:t>
                       </a:r>
                       <a:endParaRPr lang="en-GB" sz="800" dirty="0"/>
                     </a:p>
@@ -2739,7 +2739,7 @@
                             <a:srgbClr val="2C2E82"/>
                           </a:solidFill>
                         </a:rPr>
-                        <a:t>[City], [Country Abbr.]</a:t>
+                        <a:t>   [City], [Country Abbr.]</a:t>
                       </a:r>
                       <a:endParaRPr lang="en-GB" sz="1200" dirty="0"/>
                     </a:p>
@@ -2824,7 +2824,7 @@
                             <a:srgbClr val="2C2E82"/>
                           </a:solidFill>
                         </a:rPr>
-                        <a:t>[City], [Country Abbr.]</a:t>
+                        <a:t>   [City], [Country Abbr.]</a:t>
                       </a:r>
                       <a:endParaRPr lang="en-GB" sz="800" dirty="0"/>
                     </a:p>
@@ -2909,7 +2909,7 @@
                             <a:srgbClr val="2C2E82"/>
                           </a:solidFill>
                         </a:rPr>
-                        <a:t>[City], [Country Abbr.]</a:t>
+                        <a:t>   [City], [Country Abbr.]</a:t>
                       </a:r>
                       <a:endParaRPr lang="en-GB" sz="1200" dirty="0"/>
                     </a:p>
@@ -2994,7 +2994,7 @@
                             <a:srgbClr val="2C2E82"/>
                           </a:solidFill>
                         </a:rPr>
-                        <a:t>[City], [Country Abbr.]</a:t>
+                        <a:t>   [City], [Country Abbr.]</a:t>
                       </a:r>
                       <a:endParaRPr lang="en-GB" sz="800" dirty="0"/>
                     </a:p>
@@ -3079,7 +3079,7 @@
                             <a:srgbClr val="2C2E82"/>
                           </a:solidFill>
                         </a:rPr>
-                        <a:t>[City], [Country Abbr.]</a:t>
+                        <a:t>   [City], [Country Abbr.]</a:t>
                       </a:r>
                       <a:endParaRPr lang="en-GB" sz="1200" dirty="0"/>
                     </a:p>
@@ -3164,7 +3164,7 @@
                             <a:srgbClr val="2C2E82"/>
                           </a:solidFill>
                         </a:rPr>
-                        <a:t>[City], [Country Abbr.]</a:t>
+                        <a:t>   [City], [Country Abbr.]</a:t>
                       </a:r>
                       <a:endParaRPr lang="en-GB" sz="800" dirty="0"/>
                     </a:p>
@@ -3249,7 +3249,7 @@
                             <a:srgbClr val="2C2E82"/>
                           </a:solidFill>
                         </a:rPr>
-                        <a:t>[City], [Country Abbr.]</a:t>
+                        <a:t>   [City], [Country Abbr.]</a:t>
                       </a:r>
                       <a:endParaRPr lang="en-GB" sz="1200" dirty="0"/>
                     </a:p>
@@ -3334,7 +3334,7 @@
                             <a:srgbClr val="2C2E82"/>
                           </a:solidFill>
                         </a:rPr>
-                        <a:t>[City], [Country Abbr.]</a:t>
+                        <a:t>   [City], [Country Abbr.]</a:t>
                       </a:r>
                       <a:endParaRPr lang="en-GB" sz="800" dirty="0"/>
                     </a:p>
@@ -3368,14 +3368,14 @@
           <p:nvPr>
             <p:extLst>
               <p:ext uri="{D42A27DB-BD31-4B8C-83A1-F6EECF244321}">
-                <p14:modId xmlns:p14="http://schemas.microsoft.com/office/powerpoint/2010/main" val="3194823230"/>
+                <p14:modId xmlns:p14="http://schemas.microsoft.com/office/powerpoint/2010/main" val="4246252824"/>
               </p:ext>
             </p:extLst>
           </p:nvPr>
         </p:nvGraphicFramePr>
         <p:xfrm>
           <a:off x="6277748" y="1051560"/>
-          <a:ext cx="5368152" cy="4801142"/>
+          <a:ext cx="5368152" cy="5095022"/>
         </p:xfrm>
         <a:graphic>
           <a:graphicData uri="http://schemas.openxmlformats.org/drawingml/2006/table">
@@ -3414,7 +3414,7 @@
                     <a:p>
                       <a:pPr algn="ctr"/>
                       <a:r>
-                        <a:rPr lang="en-US" sz="1300" dirty="0" b="1">
+                        <a:rPr lang="en-US" sz="1300" b="1" dirty="0">
                           <a:solidFill>
                             <a:srgbClr val="FFFFFF"/>
                           </a:solidFill>
@@ -3424,7 +3424,7 @@
                       <a:endParaRPr lang="en-GB" sz="1200" dirty="0"/>
                     </a:p>
                   </a:txBody>
-                  <a:tcPr marL="91440" anchor="ctr">
+                  <a:tcPr anchor="ctr">
                     <a:solidFill>
                       <a:srgbClr val="1F2478"/>
                     </a:solidFill>
@@ -3462,7 +3462,7 @@
                   </a:ext>
                 </a:extLst>
               </a:tr>
-              <a:tr h="20000">
+              <a:tr h="0">
                 <a:tc gridSpan="3">
                   <a:txBody>
                     <a:bodyPr/>
@@ -3647,7 +3647,7 @@
                             <a:srgbClr val="2C2E82"/>
                           </a:solidFill>
                         </a:rPr>
-                        <a:t>[City], [Country Abbr.]</a:t>
+                        <a:t>   [City], [Country Abbr.]</a:t>
                       </a:r>
                       <a:endParaRPr lang="en-GB" sz="1200" dirty="0"/>
                     </a:p>
@@ -3732,7 +3732,7 @@
                             <a:srgbClr val="2C2E82"/>
                           </a:solidFill>
                         </a:rPr>
-                        <a:t>[City], [Country Abbr.]</a:t>
+                        <a:t>   [City], [Country Abbr.]</a:t>
                       </a:r>
                       <a:endParaRPr lang="en-GB" sz="800" dirty="0"/>
                     </a:p>
@@ -3817,7 +3817,7 @@
                             <a:srgbClr val="2C2E82"/>
                           </a:solidFill>
                         </a:rPr>
-                        <a:t>[City], [Country Abbr.]</a:t>
+                        <a:t>   [City], [Country Abbr.]</a:t>
                       </a:r>
                       <a:endParaRPr lang="en-GB" sz="1200" dirty="0"/>
                     </a:p>
@@ -3902,7 +3902,7 @@
                             <a:srgbClr val="2C2E82"/>
                           </a:solidFill>
                         </a:rPr>
-                        <a:t>[City], [Country Abbr.]</a:t>
+                        <a:t>   [City], [Country Abbr.]</a:t>
                       </a:r>
                       <a:endParaRPr lang="en-GB" sz="800" dirty="0"/>
                     </a:p>
@@ -3987,7 +3987,7 @@
                             <a:srgbClr val="2C2E82"/>
                           </a:solidFill>
                         </a:rPr>
-                        <a:t>[City], [Country Abbr.]</a:t>
+                        <a:t>   [City], [Country Abbr.]</a:t>
                       </a:r>
                       <a:endParaRPr lang="en-GB" sz="1200" dirty="0"/>
                     </a:p>
@@ -4072,7 +4072,7 @@
                             <a:srgbClr val="2C2E82"/>
                           </a:solidFill>
                         </a:rPr>
-                        <a:t>[City], [Country Abbr.]</a:t>
+                        <a:t>   [City], [Country Abbr.]</a:t>
                       </a:r>
                       <a:endParaRPr lang="en-GB" sz="800" dirty="0"/>
                     </a:p>
@@ -4157,7 +4157,7 @@
                             <a:srgbClr val="2C2E82"/>
                           </a:solidFill>
                         </a:rPr>
-                        <a:t>[City], [Country Abbr.]</a:t>
+                        <a:t>   [City], [Country Abbr.]</a:t>
                       </a:r>
                       <a:endParaRPr lang="en-GB" sz="1200" dirty="0"/>
                     </a:p>
@@ -4242,7 +4242,7 @@
                             <a:srgbClr val="2C2E82"/>
                           </a:solidFill>
                         </a:rPr>
-                        <a:t>[City], [Country Abbr.]</a:t>
+                        <a:t>   [City], [Country Abbr.]</a:t>
                       </a:r>
                       <a:endParaRPr lang="en-GB" sz="800" dirty="0"/>
                     </a:p>
@@ -4327,7 +4327,7 @@
                             <a:srgbClr val="2C2E82"/>
                           </a:solidFill>
                         </a:rPr>
-                        <a:t>[City], [Country Abbr.]</a:t>
+                        <a:t>   [City], [Country Abbr.]</a:t>
                       </a:r>
                       <a:endParaRPr lang="en-GB" sz="1200" dirty="0"/>
                     </a:p>
@@ -4412,7 +4412,7 @@
                             <a:srgbClr val="2C2E82"/>
                           </a:solidFill>
                         </a:rPr>
-                        <a:t>[City], [Country Abbr.]</a:t>
+                        <a:t>   [City], [Country Abbr.]</a:t>
                       </a:r>
                       <a:endParaRPr lang="en-GB" sz="800" dirty="0"/>
                     </a:p>
@@ -4497,7 +4497,7 @@
                             <a:srgbClr val="2C2E82"/>
                           </a:solidFill>
                         </a:rPr>
-                        <a:t>[City], [Country Abbr.]</a:t>
+                        <a:t>   [City], [Country Abbr.]</a:t>
                       </a:r>
                       <a:endParaRPr lang="en-GB" sz="1200" dirty="0"/>
                     </a:p>
@@ -4582,7 +4582,7 @@
                             <a:srgbClr val="2C2E82"/>
                           </a:solidFill>
                         </a:rPr>
-                        <a:t>[City], [Country Abbr.]</a:t>
+                        <a:t>   [City], [Country Abbr.]</a:t>
                       </a:r>
                       <a:endParaRPr lang="en-GB" sz="800" dirty="0"/>
                     </a:p>
@@ -4667,7 +4667,7 @@
                             <a:srgbClr val="2C2E82"/>
                           </a:solidFill>
                         </a:rPr>
-                        <a:t>[City], [Country Abbr.]</a:t>
+                        <a:t>   [City], [Country Abbr.]</a:t>
                       </a:r>
                       <a:endParaRPr lang="en-GB" sz="1200" dirty="0"/>
                     </a:p>
@@ -4752,7 +4752,7 @@
                             <a:srgbClr val="2C2E82"/>
                           </a:solidFill>
                         </a:rPr>
-                        <a:t>[City], [Country Abbr.]</a:t>
+                        <a:t>   [City], [Country Abbr.]</a:t>
                       </a:r>
                       <a:endParaRPr lang="en-GB" sz="800" dirty="0"/>
                     </a:p>
@@ -5624,28 +5624,6 @@
 </file>
 
 <file path=customXml/item1.xml><?xml version="1.0" encoding="utf-8"?>
-<?mso-contentType ?>
-<FormTemplates xmlns="http://schemas.microsoft.com/sharepoint/v3/contenttype/forms">
-  <Display>DocumentLibraryForm</Display>
-  <Edit>DocumentLibraryForm</Edit>
-  <New>DocumentLibraryForm</New>
-</FormTemplates>
-</file>
-
-<file path=customXml/item2.xml><?xml version="1.0" encoding="utf-8"?>
-<p:properties xmlns:p="http://schemas.microsoft.com/office/2006/metadata/properties" xmlns:xsi="http://www.w3.org/2001/XMLSchema-instance" xmlns:pc="http://schemas.microsoft.com/office/infopath/2007/PartnerControls">
-  <documentManagement>
-    <TaxCatchAll xmlns="8fe6d124-157e-4db3-accf-90154e53f67d" xsi:nil="true"/>
-    <_ip_UnifiedCompliancePolicyUIAction xmlns="http://schemas.microsoft.com/sharepoint/v3" xsi:nil="true"/>
-    <lcf76f155ced4ddcb4097134ff3c332f xmlns="c59d7448-2016-48ac-8116-1a263a71d5c2">
-      <Terms xmlns="http://schemas.microsoft.com/office/infopath/2007/PartnerControls"/>
-    </lcf76f155ced4ddcb4097134ff3c332f>
-    <_ip_UnifiedCompliancePolicyProperties xmlns="http://schemas.microsoft.com/sharepoint/v3" xsi:nil="true"/>
-  </documentManagement>
-</p:properties>
-</file>
-
-<file path=customXml/item3.xml><?xml version="1.0" encoding="utf-8"?>
 <ct:contentTypeSchema xmlns:ct="http://schemas.microsoft.com/office/2006/metadata/contentType" xmlns:ma="http://schemas.microsoft.com/office/2006/metadata/properties/metaAttributes" ct:_="" ma:_="" ma:contentTypeName="Document" ma:contentTypeID="0x010100D8B187BE3B3AEC4AB8674E2C30249C78" ma:contentTypeVersion="26" ma:contentTypeDescription="Create a new document." ma:contentTypeScope="" ma:versionID="a6bb2971ac57d20158ebc689397b4758">
   <xsd:schema xmlns:xsd="http://www.w3.org/2001/XMLSchema" xmlns:xs="http://www.w3.org/2001/XMLSchema" xmlns:p="http://schemas.microsoft.com/office/2006/metadata/properties" xmlns:ns1="http://schemas.microsoft.com/sharepoint/v3" xmlns:ns2="8fe6d124-157e-4db3-accf-90154e53f67d" xmlns:ns3="c59d7448-2016-48ac-8116-1a263a71d5c2" targetNamespace="http://schemas.microsoft.com/office/2006/metadata/properties" ma:root="true" ma:fieldsID="8a5a5e648fbb586fb833005c4f0aa645" ns1:_="" ns2:_="" ns3:_="">
     <xsd:import namespace="http://schemas.microsoft.com/sharepoint/v3"/>
@@ -5937,10 +5915,44 @@
 </ct:contentTypeSchema>
 </file>
 
+<file path=customXml/item2.xml><?xml version="1.0" encoding="utf-8"?>
+<p:properties xmlns:p="http://schemas.microsoft.com/office/2006/metadata/properties" xmlns:xsi="http://www.w3.org/2001/XMLSchema-instance" xmlns:pc="http://schemas.microsoft.com/office/infopath/2007/PartnerControls">
+  <documentManagement>
+    <TaxCatchAll xmlns="8fe6d124-157e-4db3-accf-90154e53f67d" xsi:nil="true"/>
+    <_ip_UnifiedCompliancePolicyUIAction xmlns="http://schemas.microsoft.com/sharepoint/v3" xsi:nil="true"/>
+    <lcf76f155ced4ddcb4097134ff3c332f xmlns="c59d7448-2016-48ac-8116-1a263a71d5c2">
+      <Terms xmlns="http://schemas.microsoft.com/office/infopath/2007/PartnerControls"/>
+    </lcf76f155ced4ddcb4097134ff3c332f>
+    <_ip_UnifiedCompliancePolicyProperties xmlns="http://schemas.microsoft.com/sharepoint/v3" xsi:nil="true"/>
+  </documentManagement>
+</p:properties>
+</file>
+
+<file path=customXml/item3.xml><?xml version="1.0" encoding="utf-8"?>
+<?mso-contentType ?>
+<FormTemplates xmlns="http://schemas.microsoft.com/sharepoint/v3/contenttype/forms">
+  <Display>DocumentLibraryForm</Display>
+  <Edit>DocumentLibraryForm</Edit>
+  <New>DocumentLibraryForm</New>
+</FormTemplates>
+</file>
+
 <file path=customXml/itemProps1.xml><?xml version="1.0" encoding="utf-8"?>
-<ds:datastoreItem xmlns:ds="http://schemas.openxmlformats.org/officeDocument/2006/customXml" ds:itemID="{2AEABEF3-214C-490F-9B30-301C49BB922A}">
+<ds:datastoreItem xmlns:ds="http://schemas.openxmlformats.org/officeDocument/2006/customXml" ds:itemID="{ED3C508D-34E3-4102-9D46-CA5396ABF18C}">
   <ds:schemaRefs>
-    <ds:schemaRef ds:uri="http://schemas.microsoft.com/sharepoint/v3/contenttype/forms"/>
+    <ds:schemaRef ds:uri="http://schemas.microsoft.com/office/2006/metadata/contentType"/>
+    <ds:schemaRef ds:uri="http://schemas.microsoft.com/office/2006/metadata/properties/metaAttributes"/>
+    <ds:schemaRef ds:uri="http://www.w3.org/2001/XMLSchema"/>
+    <ds:schemaRef ds:uri="http://schemas.microsoft.com/office/2006/metadata/properties"/>
+    <ds:schemaRef ds:uri="http://schemas.microsoft.com/sharepoint/v3"/>
+    <ds:schemaRef ds:uri="8fe6d124-157e-4db3-accf-90154e53f67d"/>
+    <ds:schemaRef ds:uri="c59d7448-2016-48ac-8116-1a263a71d5c2"/>
+    <ds:schemaRef ds:uri="http://schemas.microsoft.com/office/2006/documentManagement/types"/>
+    <ds:schemaRef ds:uri="http://schemas.microsoft.com/office/infopath/2007/PartnerControls"/>
+    <ds:schemaRef ds:uri="http://schemas.openxmlformats.org/package/2006/metadata/core-properties"/>
+    <ds:schemaRef ds:uri="http://purl.org/dc/elements/1.1/"/>
+    <ds:schemaRef ds:uri="http://purl.org/dc/terms/"/>
+    <ds:schemaRef ds:uri="http://schemas.microsoft.com/internal/obd"/>
   </ds:schemaRefs>
 </ds:datastoreItem>
 </file>
@@ -5958,10 +5970,17 @@
     <ds:schemaRef ds:uri="http://schemas.openxmlformats.org/package/2006/metadata/core-properties"/>
     <ds:schemaRef ds:uri="ef85c670-a924-4738-838f-c9c8efbd965c"/>
     <ds:schemaRef ds:uri="http://purl.org/dc/elements/1.1/"/>
+    <ds:schemaRef ds:uri="8fe6d124-157e-4db3-accf-90154e53f67d"/>
+    <ds:schemaRef ds:uri="http://schemas.microsoft.com/sharepoint/v3"/>
+    <ds:schemaRef ds:uri="c59d7448-2016-48ac-8116-1a263a71d5c2"/>
   </ds:schemaRefs>
 </ds:datastoreItem>
 </file>
 
 <file path=customXml/itemProps3.xml><?xml version="1.0" encoding="utf-8"?>
-<ds:datastoreItem xmlns:ds="http://schemas.openxmlformats.org/officeDocument/2006/customXml" ds:itemID="{ED3C508D-34E3-4102-9D46-CA5396ABF18C}"/>
+<ds:datastoreItem xmlns:ds="http://schemas.openxmlformats.org/officeDocument/2006/customXml" ds:itemID="{2AEABEF3-214C-490F-9B30-301C49BB922A}">
+  <ds:schemaRefs>
+    <ds:schemaRef ds:uri="http://schemas.microsoft.com/sharepoint/v3/contenttype/forms"/>
+  </ds:schemaRefs>
+</ds:datastoreItem>
 </file>
--- a/templates/Track_Record_Logo_TEMPLATE.pptx
+++ b/templates/Track_Record_Logo_TEMPLATE.pptx
@@ -289,7 +289,7 @@
           <a:p>
             <a:fld id="{AF9124C0-B47C-2D4D-B7DA-E1D6FCB07920}" type="datetimeFigureOut">
               <a:rPr lang="en-US" smtClean="0"/>
-              <a:t>8/31/2026</a:t>
+              <a:t>7/23/2026</a:t>
             </a:fld>
             <a:endParaRPr lang="en-US"/>
           </a:p>
@@ -466,7 +466,7 @@
           <a:p>
             <a:fld id="{4672F554-F5A9-ED4C-BC96-1B154D77C3BA}" type="datetimeFigureOut">
               <a:rPr lang="en-US" smtClean="0"/>
-              <a:t>8/31/2026</a:t>
+              <a:t>7/23/2026</a:t>
             </a:fld>
             <a:endParaRPr lang="en-US"/>
           </a:p>
@@ -1950,14 +1950,14 @@
           <p:nvPr>
             <p:extLst>
               <p:ext uri="{D42A27DB-BD31-4B8C-83A1-F6EECF244321}">
-                <p14:modId xmlns:p14="http://schemas.microsoft.com/office/powerpoint/2010/main" val="1451964741"/>
+                <p14:modId xmlns:p14="http://schemas.microsoft.com/office/powerpoint/2010/main" val="510571279"/>
               </p:ext>
             </p:extLst>
           </p:nvPr>
         </p:nvGraphicFramePr>
         <p:xfrm>
           <a:off x="538872" y="1051560"/>
-          <a:ext cx="5368152" cy="5095022"/>
+          <a:ext cx="5368152" cy="4801142"/>
         </p:xfrm>
         <a:graphic>
           <a:graphicData uri="http://schemas.openxmlformats.org/drawingml/2006/table">
@@ -1996,7 +1996,7 @@
                     <a:p>
                       <a:pPr algn="ctr"/>
                       <a:r>
-                        <a:rPr lang="en-US" sz="1300" b="1" dirty="0">
+                        <a:rPr lang="en-US" sz="1300" dirty="0" b="1">
                           <a:solidFill>
                             <a:srgbClr val="FFFFFF"/>
                           </a:solidFill>
@@ -2006,7 +2006,7 @@
                       <a:endParaRPr lang="en-GB" sz="1200" dirty="0"/>
                     </a:p>
                   </a:txBody>
-                  <a:tcPr anchor="ctr">
+                  <a:tcPr marL="91440" anchor="ctr">
                     <a:solidFill>
                       <a:srgbClr val="1F2478"/>
                     </a:solidFill>
@@ -2044,7 +2044,7 @@
                   </a:ext>
                 </a:extLst>
               </a:tr>
-              <a:tr h="0">
+              <a:tr h="20000">
                 <a:tc gridSpan="3">
                   <a:txBody>
                     <a:bodyPr/>
@@ -2229,12 +2229,12 @@
                             <a:srgbClr val="2C2E82"/>
                           </a:solidFill>
                         </a:rPr>
-                        <a:t>   [City], [Country      Abbr.]</a:t>
+                        <a:t>[City], [Country Abbr.]</a:t>
                       </a:r>
                       <a:endParaRPr lang="en-GB" sz="1200" dirty="0"/>
                     </a:p>
                   </a:txBody>
-                  <a:tcPr marT="0" marB="0" anchor="ctr">
+                  <a:tcPr marT="0" marB="0" anchor="ctr" marL="180000">
                     <a:noFill/>
                   </a:tcPr>
                 </a:tc>
@@ -2314,12 +2314,12 @@
                             <a:srgbClr val="2C2E82"/>
                           </a:solidFill>
                         </a:rPr>
-                        <a:t>   [City], [Country Abbr.]</a:t>
+                        <a:t>[City], [Country Abbr.]</a:t>
                       </a:r>
                       <a:endParaRPr lang="en-GB" sz="800" dirty="0"/>
                     </a:p>
                   </a:txBody>
-                  <a:tcPr marT="0" marB="0" anchor="ctr">
+                  <a:tcPr marT="0" marB="0" anchor="ctr" marL="180000">
                     <a:noFill/>
                   </a:tcPr>
                 </a:tc>
@@ -2399,12 +2399,12 @@
                             <a:srgbClr val="2C2E82"/>
                           </a:solidFill>
                         </a:rPr>
-                        <a:t>   [City], [Country Abbr.]</a:t>
+                        <a:t>[City], [Country Abbr.]</a:t>
                       </a:r>
                       <a:endParaRPr lang="en-GB" sz="1200" dirty="0"/>
                     </a:p>
                   </a:txBody>
-                  <a:tcPr marT="0" marB="0" anchor="ctr">
+                  <a:tcPr marT="0" marB="0" anchor="ctr" marL="180000">
                     <a:noFill/>
                   </a:tcPr>
                 </a:tc>
@@ -2484,12 +2484,12 @@
                             <a:srgbClr val="2C2E82"/>
                           </a:solidFill>
                         </a:rPr>
-                        <a:t>   [City], [Country Abbr.]</a:t>
+                        <a:t>[City], [Country Abbr.]</a:t>
                       </a:r>
                       <a:endParaRPr lang="en-GB" sz="800" dirty="0"/>
                     </a:p>
                   </a:txBody>
-                  <a:tcPr marT="0" marB="0" anchor="ctr">
+                  <a:tcPr marT="0" marB="0" anchor="ctr" marL="180000">
                     <a:noFill/>
                   </a:tcPr>
                 </a:tc>
@@ -2569,12 +2569,12 @@
                             <a:srgbClr val="2C2E82"/>
                           </a:solidFill>
                         </a:rPr>
-                        <a:t>   [City], [Country Abbr.]</a:t>
+                        <a:t>[City], [Country Abbr.]</a:t>
                       </a:r>
                       <a:endParaRPr lang="en-GB" sz="1200" dirty="0"/>
                     </a:p>
                   </a:txBody>
-                  <a:tcPr marT="0" marB="0" anchor="ctr">
+                  <a:tcPr marT="0" marB="0" anchor="ctr" marL="180000">
                     <a:noFill/>
                   </a:tcPr>
                 </a:tc>
@@ -2654,12 +2654,12 @@
                             <a:srgbClr val="2C2E82"/>
                           </a:solidFill>
                         </a:rPr>
-                        <a:t>   [City], [Country Abbr.]</a:t>
+                        <a:t>[City], [Country Abbr.]</a:t>
                       </a:r>
                       <a:endParaRPr lang="en-GB" sz="800" dirty="0"/>
                     </a:p>
                   </a:txBody>
-                  <a:tcPr marT="0" marB="0" anchor="ctr">
+                  <a:tcPr marT="0" marB="0" anchor="ctr" marL="180000">
                     <a:noFill/>
                   </a:tcPr>
                 </a:tc>
@@ -2739,12 +2739,12 @@
                             <a:srgbClr val="2C2E82"/>
                           </a:solidFill>
                         </a:rPr>
-                        <a:t>   [City], [Country Abbr.]</a:t>
+                        <a:t>[City], [Country Abbr.]</a:t>
                       </a:r>
                       <a:endParaRPr lang="en-GB" sz="1200" dirty="0"/>
                     </a:p>
                   </a:txBody>
-                  <a:tcPr marT="0" marB="0" anchor="ctr">
+                  <a:tcPr marT="0" marB="0" anchor="ctr" marL="180000">
                     <a:noFill/>
                   </a:tcPr>
                 </a:tc>
@@ -2824,12 +2824,12 @@
                             <a:srgbClr val="2C2E82"/>
                           </a:solidFill>
                         </a:rPr>
-                        <a:t>   [City], [Country Abbr.]</a:t>
+                        <a:t>[City], [Country Abbr.]</a:t>
                       </a:r>
                       <a:endParaRPr lang="en-GB" sz="800" dirty="0"/>
                     </a:p>
                   </a:txBody>
-                  <a:tcPr marT="0" marB="0" anchor="ctr">
+                  <a:tcPr marT="0" marB="0" anchor="ctr" marL="180000">
                     <a:noFill/>
                   </a:tcPr>
                 </a:tc>
@@ -2909,12 +2909,12 @@
                             <a:srgbClr val="2C2E82"/>
                           </a:solidFill>
                         </a:rPr>
-                        <a:t>   [City], [Country Abbr.]</a:t>
+                        <a:t>[City], [Country Abbr.]</a:t>
                       </a:r>
                       <a:endParaRPr lang="en-GB" sz="1200" dirty="0"/>
                     </a:p>
                   </a:txBody>
-                  <a:tcPr marT="0" marB="0" anchor="ctr">
+                  <a:tcPr marT="0" marB="0" anchor="ctr" marL="180000">
                     <a:noFill/>
                   </a:tcPr>
                 </a:tc>
@@ -2994,12 +2994,12 @@
                             <a:srgbClr val="2C2E82"/>
                           </a:solidFill>
                         </a:rPr>
-                        <a:t>   [City], [Country Abbr.]</a:t>
+                        <a:t>[City], [Country Abbr.]</a:t>
                       </a:r>
                       <a:endParaRPr lang="en-GB" sz="800" dirty="0"/>
                     </a:p>
                   </a:txBody>
-                  <a:tcPr marT="0" marB="0" anchor="ctr">
+                  <a:tcPr marT="0" marB="0" anchor="ctr" marL="180000">
                     <a:noFill/>
                   </a:tcPr>
                 </a:tc>
@@ -3079,12 +3079,12 @@
                             <a:srgbClr val="2C2E82"/>
                           </a:solidFill>
                         </a:rPr>
-                        <a:t>   [City], [Country Abbr.]</a:t>
+                        <a:t>[City], [Country Abbr.]</a:t>
                       </a:r>
                       <a:endParaRPr lang="en-GB" sz="1200" dirty="0"/>
                     </a:p>
                   </a:txBody>
-                  <a:tcPr marT="0" marB="0" anchor="ctr">
+                  <a:tcPr marT="0" marB="0" anchor="ctr" marL="180000">
                     <a:noFill/>
                   </a:tcPr>
                 </a:tc>
@@ -3164,12 +3164,12 @@
                             <a:srgbClr val="2C2E82"/>
                           </a:solidFill>
                         </a:rPr>
-                        <a:t>   [City], [Country Abbr.]</a:t>
+                        <a:t>[City], [Country Abbr.]</a:t>
                       </a:r>
                       <a:endParaRPr lang="en-GB" sz="800" dirty="0"/>
                     </a:p>
                   </a:txBody>
-                  <a:tcPr marT="0" marB="0" anchor="ctr">
+                  <a:tcPr marT="0" marB="0" anchor="ctr" marL="180000">
                     <a:noFill/>
                   </a:tcPr>
                 </a:tc>
@@ -3249,12 +3249,12 @@
                             <a:srgbClr val="2C2E82"/>
                           </a:solidFill>
                         </a:rPr>
-                        <a:t>   [City], [Country Abbr.]</a:t>
+                        <a:t>[City], [Country Abbr.]</a:t>
                       </a:r>
                       <a:endParaRPr lang="en-GB" sz="1200" dirty="0"/>
                     </a:p>
                   </a:txBody>
-                  <a:tcPr marT="0" marB="0" anchor="ctr">
+                  <a:tcPr marT="0" marB="0" anchor="ctr" marL="180000">
                     <a:noFill/>
                   </a:tcPr>
                 </a:tc>
@@ -3334,12 +3334,12 @@
                             <a:srgbClr val="2C2E82"/>
                           </a:solidFill>
                         </a:rPr>
-                        <a:t>   [City], [Country Abbr.]</a:t>
+                        <a:t>[City], [Country Abbr.]</a:t>
                       </a:r>
                       <a:endParaRPr lang="en-GB" sz="800" dirty="0"/>
                     </a:p>
                   </a:txBody>
-                  <a:tcPr marT="0" marB="0" anchor="ctr">
+                  <a:tcPr marT="0" marB="0" anchor="ctr" marL="180000">
                     <a:noFill/>
                   </a:tcPr>
                 </a:tc>
@@ -3368,14 +3368,14 @@
           <p:nvPr>
             <p:extLst>
               <p:ext uri="{D42A27DB-BD31-4B8C-83A1-F6EECF244321}">
-                <p14:modId xmlns:p14="http://schemas.microsoft.com/office/powerpoint/2010/main" val="4246252824"/>
+                <p14:modId xmlns:p14="http://schemas.microsoft.com/office/powerpoint/2010/main" val="3194823230"/>
               </p:ext>
             </p:extLst>
           </p:nvPr>
         </p:nvGraphicFramePr>
         <p:xfrm>
           <a:off x="6277748" y="1051560"/>
-          <a:ext cx="5368152" cy="5095022"/>
+          <a:ext cx="5368152" cy="4801142"/>
         </p:xfrm>
         <a:graphic>
           <a:graphicData uri="http://schemas.openxmlformats.org/drawingml/2006/table">
@@ -3414,7 +3414,7 @@
                     <a:p>
                       <a:pPr algn="ctr"/>
                       <a:r>
-                        <a:rPr lang="en-US" sz="1300" b="1" dirty="0">
+                        <a:rPr lang="en-US" sz="1300" dirty="0" b="1">
                           <a:solidFill>
                             <a:srgbClr val="FFFFFF"/>
                           </a:solidFill>
@@ -3424,7 +3424,7 @@
                       <a:endParaRPr lang="en-GB" sz="1200" dirty="0"/>
                     </a:p>
                   </a:txBody>
-                  <a:tcPr anchor="ctr">
+                  <a:tcPr marL="91440" anchor="ctr">
                     <a:solidFill>
                       <a:srgbClr val="1F2478"/>
                     </a:solidFill>
@@ -3462,7 +3462,7 @@
                   </a:ext>
                 </a:extLst>
               </a:tr>
-              <a:tr h="0">
+              <a:tr h="20000">
                 <a:tc gridSpan="3">
                   <a:txBody>
                     <a:bodyPr/>
@@ -3647,12 +3647,12 @@
                             <a:srgbClr val="2C2E82"/>
                           </a:solidFill>
                         </a:rPr>
-                        <a:t>   [City], [Country Abbr.]</a:t>
+                        <a:t>[City], [Country Abbr.]</a:t>
                       </a:r>
                       <a:endParaRPr lang="en-GB" sz="1200" dirty="0"/>
                     </a:p>
                   </a:txBody>
-                  <a:tcPr marT="0" marB="0" anchor="ctr">
+                  <a:tcPr marT="0" marB="0" anchor="ctr" marL="180000">
                     <a:noFill/>
                   </a:tcPr>
                 </a:tc>
@@ -3732,12 +3732,12 @@
                             <a:srgbClr val="2C2E82"/>
                           </a:solidFill>
                         </a:rPr>
-                        <a:t>   [City], [Country Abbr.]</a:t>
+                        <a:t>[City], [Country Abbr.]</a:t>
                       </a:r>
                       <a:endParaRPr lang="en-GB" sz="800" dirty="0"/>
                     </a:p>
                   </a:txBody>
-                  <a:tcPr marT="0" marB="0" anchor="ctr">
+                  <a:tcPr marT="0" marB="0" anchor="ctr" marL="180000">
                     <a:noFill/>
                   </a:tcPr>
                 </a:tc>
@@ -3817,12 +3817,12 @@
                             <a:srgbClr val="2C2E82"/>
                           </a:solidFill>
                         </a:rPr>
-                        <a:t>   [City], [Country Abbr.]</a:t>
+                        <a:t>[City], [Country Abbr.]</a:t>
                       </a:r>
                       <a:endParaRPr lang="en-GB" sz="1200" dirty="0"/>
                     </a:p>
                   </a:txBody>
-                  <a:tcPr marT="0" marB="0" anchor="ctr">
+                  <a:tcPr marT="0" marB="0" anchor="ctr" marL="180000">
                     <a:noFill/>
                   </a:tcPr>
                 </a:tc>
@@ -3902,12 +3902,12 @@
                             <a:srgbClr val="2C2E82"/>
                           </a:solidFill>
                         </a:rPr>
-                        <a:t>   [City], [Country Abbr.]</a:t>
+                        <a:t>[City], [Country Abbr.]</a:t>
                       </a:r>
                       <a:endParaRPr lang="en-GB" sz="800" dirty="0"/>
                     </a:p>
                   </a:txBody>
-                  <a:tcPr marT="0" marB="0" anchor="ctr">
+                  <a:tcPr marT="0" marB="0" anchor="ctr" marL="180000">
                     <a:noFill/>
                   </a:tcPr>
                 </a:tc>
@@ -3987,12 +3987,12 @@
                             <a:srgbClr val="2C2E82"/>
                           </a:solidFill>
                         </a:rPr>
-                        <a:t>   [City], [Country Abbr.]</a:t>
+                        <a:t>[City], [Country Abbr.]</a:t>
                       </a:r>
                       <a:endParaRPr lang="en-GB" sz="1200" dirty="0"/>
                     </a:p>
                   </a:txBody>
-                  <a:tcPr marT="0" marB="0" anchor="ctr">
+                  <a:tcPr marT="0" marB="0" anchor="ctr" marL="180000">
                     <a:noFill/>
                   </a:tcPr>
                 </a:tc>
@@ -4072,12 +4072,12 @@
                             <a:srgbClr val="2C2E82"/>
                           </a:solidFill>
                         </a:rPr>
-                        <a:t>   [City], [Country Abbr.]</a:t>
+                        <a:t>[City], [Country Abbr.]</a:t>
                       </a:r>
                       <a:endParaRPr lang="en-GB" sz="800" dirty="0"/>
                     </a:p>
                   </a:txBody>
-                  <a:tcPr marT="0" marB="0" anchor="ctr">
+                  <a:tcPr marT="0" marB="0" anchor="ctr" marL="180000">
                     <a:noFill/>
                   </a:tcPr>
                 </a:tc>
@@ -4157,12 +4157,12 @@
                             <a:srgbClr val="2C2E82"/>
                           </a:solidFill>
                         </a:rPr>
-                        <a:t>   [City], [Country Abbr.]</a:t>
+                        <a:t>[City], [Country Abbr.]</a:t>
                       </a:r>
                       <a:endParaRPr lang="en-GB" sz="1200" dirty="0"/>
                     </a:p>
                   </a:txBody>
-                  <a:tcPr marT="0" marB="0" anchor="ctr">
+                  <a:tcPr marT="0" marB="0" anchor="ctr" marL="180000">
                     <a:noFill/>
                   </a:tcPr>
                 </a:tc>
@@ -4242,12 +4242,12 @@
                             <a:srgbClr val="2C2E82"/>
                           </a:solidFill>
                         </a:rPr>
-                        <a:t>   [City], [Country Abbr.]</a:t>
+                        <a:t>[City], [Country Abbr.]</a:t>
                       </a:r>
                       <a:endParaRPr lang="en-GB" sz="800" dirty="0"/>
                     </a:p>
                   </a:txBody>
-                  <a:tcPr marT="0" marB="0" anchor="ctr">
+                  <a:tcPr marT="0" marB="0" anchor="ctr" marL="180000">
                     <a:noFill/>
                   </a:tcPr>
                 </a:tc>
@@ -4327,12 +4327,12 @@
                             <a:srgbClr val="2C2E82"/>
                           </a:solidFill>
                         </a:rPr>
-                        <a:t>   [City], [Country Abbr.]</a:t>
+                        <a:t>[City], [Country Abbr.]</a:t>
                       </a:r>
                       <a:endParaRPr lang="en-GB" sz="1200" dirty="0"/>
                     </a:p>
                   </a:txBody>
-                  <a:tcPr marT="0" marB="0" anchor="ctr">
+                  <a:tcPr marT="0" marB="0" anchor="ctr" marL="180000">
                     <a:noFill/>
                   </a:tcPr>
                 </a:tc>
@@ -4412,12 +4412,12 @@
                             <a:srgbClr val="2C2E82"/>
                           </a:solidFill>
                         </a:rPr>
-                        <a:t>   [City], [Country Abbr.]</a:t>
+                        <a:t>[City], [Country Abbr.]</a:t>
                       </a:r>
                       <a:endParaRPr lang="en-GB" sz="800" dirty="0"/>
                     </a:p>
                   </a:txBody>
-                  <a:tcPr marT="0" marB="0" anchor="ctr">
+                  <a:tcPr marT="0" marB="0" anchor="ctr" marL="180000">
                     <a:noFill/>
                   </a:tcPr>
                 </a:tc>
@@ -4497,12 +4497,12 @@
                             <a:srgbClr val="2C2E82"/>
                           </a:solidFill>
                         </a:rPr>
-                        <a:t>   [City], [Country Abbr.]</a:t>
+                        <a:t>[City], [Country Abbr.]</a:t>
                       </a:r>
                       <a:endParaRPr lang="en-GB" sz="1200" dirty="0"/>
                     </a:p>
                   </a:txBody>
-                  <a:tcPr marT="0" marB="0" anchor="ctr">
+                  <a:tcPr marT="0" marB="0" anchor="ctr" marL="180000">
                     <a:noFill/>
                   </a:tcPr>
                 </a:tc>
@@ -4582,12 +4582,12 @@
                             <a:srgbClr val="2C2E82"/>
                           </a:solidFill>
                         </a:rPr>
-                        <a:t>   [City], [Country Abbr.]</a:t>
+                        <a:t>[City], [Country Abbr.]</a:t>
                       </a:r>
                       <a:endParaRPr lang="en-GB" sz="800" dirty="0"/>
                     </a:p>
                   </a:txBody>
-                  <a:tcPr marT="0" marB="0" anchor="ctr">
+                  <a:tcPr marT="0" marB="0" anchor="ctr" marL="180000">
                     <a:noFill/>
                   </a:tcPr>
                 </a:tc>
@@ -4667,12 +4667,12 @@
                             <a:srgbClr val="2C2E82"/>
                           </a:solidFill>
                         </a:rPr>
-                        <a:t>   [City], [Country Abbr.]</a:t>
+                        <a:t>[City], [Country Abbr.]</a:t>
                       </a:r>
                       <a:endParaRPr lang="en-GB" sz="1200" dirty="0"/>
                     </a:p>
                   </a:txBody>
-                  <a:tcPr marT="0" marB="0" anchor="ctr">
+                  <a:tcPr marT="0" marB="0" anchor="ctr" marL="180000">
                     <a:noFill/>
                   </a:tcPr>
                 </a:tc>
@@ -4752,12 +4752,12 @@
                             <a:srgbClr val="2C2E82"/>
                           </a:solidFill>
                         </a:rPr>
-                        <a:t>   [City], [Country Abbr.]</a:t>
+                        <a:t>[City], [Country Abbr.]</a:t>
                       </a:r>
                       <a:endParaRPr lang="en-GB" sz="800" dirty="0"/>
                     </a:p>
                   </a:txBody>
-                  <a:tcPr marT="0" marB="0" anchor="ctr">
+                  <a:tcPr marT="0" marB="0" anchor="ctr" marL="180000">
                     <a:noFill/>
                   </a:tcPr>
                 </a:tc>
@@ -5624,6 +5624,28 @@
 </file>
 
 <file path=customXml/item1.xml><?xml version="1.0" encoding="utf-8"?>
+<?mso-contentType ?>
+<FormTemplates xmlns="http://schemas.microsoft.com/sharepoint/v3/contenttype/forms">
+  <Display>DocumentLibraryForm</Display>
+  <Edit>DocumentLibraryForm</Edit>
+  <New>DocumentLibraryForm</New>
+</FormTemplates>
+</file>
+
+<file path=customXml/item2.xml><?xml version="1.0" encoding="utf-8"?>
+<p:properties xmlns:p="http://schemas.microsoft.com/office/2006/metadata/properties" xmlns:xsi="http://www.w3.org/2001/XMLSchema-instance" xmlns:pc="http://schemas.microsoft.com/office/infopath/2007/PartnerControls">
+  <documentManagement>
+    <TaxCatchAll xmlns="8fe6d124-157e-4db3-accf-90154e53f67d" xsi:nil="true"/>
+    <_ip_UnifiedCompliancePolicyUIAction xmlns="http://schemas.microsoft.com/sharepoint/v3" xsi:nil="true"/>
+    <lcf76f155ced4ddcb4097134ff3c332f xmlns="c59d7448-2016-48ac-8116-1a263a71d5c2">
+      <Terms xmlns="http://schemas.microsoft.com/office/infopath/2007/PartnerControls"/>
+    </lcf76f155ced4ddcb4097134ff3c332f>
+    <_ip_UnifiedCompliancePolicyProperties xmlns="http://schemas.microsoft.com/sharepoint/v3" xsi:nil="true"/>
+  </documentManagement>
+</p:properties>
+</file>
+
+<file path=customXml/item3.xml><?xml version="1.0" encoding="utf-8"?>
 <ct:contentTypeSchema xmlns:ct="http://schemas.microsoft.com/office/2006/metadata/contentType" xmlns:ma="http://schemas.microsoft.com/office/2006/metadata/properties/metaAttributes" ct:_="" ma:_="" ma:contentTypeName="Document" ma:contentTypeID="0x010100D8B187BE3B3AEC4AB8674E2C30249C78" ma:contentTypeVersion="26" ma:contentTypeDescription="Create a new document." ma:contentTypeScope="" ma:versionID="a6bb2971ac57d20158ebc689397b4758">
   <xsd:schema xmlns:xsd="http://www.w3.org/2001/XMLSchema" xmlns:xs="http://www.w3.org/2001/XMLSchema" xmlns:p="http://schemas.microsoft.com/office/2006/metadata/properties" xmlns:ns1="http://schemas.microsoft.com/sharepoint/v3" xmlns:ns2="8fe6d124-157e-4db3-accf-90154e53f67d" xmlns:ns3="c59d7448-2016-48ac-8116-1a263a71d5c2" targetNamespace="http://schemas.microsoft.com/office/2006/metadata/properties" ma:root="true" ma:fieldsID="8a5a5e648fbb586fb833005c4f0aa645" ns1:_="" ns2:_="" ns3:_="">
     <xsd:import namespace="http://schemas.microsoft.com/sharepoint/v3"/>
@@ -5915,44 +5937,10 @@
 </ct:contentTypeSchema>
 </file>
 
-<file path=customXml/item2.xml><?xml version="1.0" encoding="utf-8"?>
-<p:properties xmlns:p="http://schemas.microsoft.com/office/2006/metadata/properties" xmlns:xsi="http://www.w3.org/2001/XMLSchema-instance" xmlns:pc="http://schemas.microsoft.com/office/infopath/2007/PartnerControls">
-  <documentManagement>
-    <TaxCatchAll xmlns="8fe6d124-157e-4db3-accf-90154e53f67d" xsi:nil="true"/>
-    <_ip_UnifiedCompliancePolicyUIAction xmlns="http://schemas.microsoft.com/sharepoint/v3" xsi:nil="true"/>
-    <lcf76f155ced4ddcb4097134ff3c332f xmlns="c59d7448-2016-48ac-8116-1a263a71d5c2">
-      <Terms xmlns="http://schemas.microsoft.com/office/infopath/2007/PartnerControls"/>
-    </lcf76f155ced4ddcb4097134ff3c332f>
-    <_ip_UnifiedCompliancePolicyProperties xmlns="http://schemas.microsoft.com/sharepoint/v3" xsi:nil="true"/>
-  </documentManagement>
-</p:properties>
-</file>
-
-<file path=customXml/item3.xml><?xml version="1.0" encoding="utf-8"?>
-<?mso-contentType ?>
-<FormTemplates xmlns="http://schemas.microsoft.com/sharepoint/v3/contenttype/forms">
-  <Display>DocumentLibraryForm</Display>
-  <Edit>DocumentLibraryForm</Edit>
-  <New>DocumentLibraryForm</New>
-</FormTemplates>
-</file>
-
 <file path=customXml/itemProps1.xml><?xml version="1.0" encoding="utf-8"?>
-<ds:datastoreItem xmlns:ds="http://schemas.openxmlformats.org/officeDocument/2006/customXml" ds:itemID="{ED3C508D-34E3-4102-9D46-CA5396ABF18C}">
+<ds:datastoreItem xmlns:ds="http://schemas.openxmlformats.org/officeDocument/2006/customXml" ds:itemID="{2AEABEF3-214C-490F-9B30-301C49BB922A}">
   <ds:schemaRefs>
-    <ds:schemaRef ds:uri="http://schemas.microsoft.com/office/2006/metadata/contentType"/>
-    <ds:schemaRef ds:uri="http://schemas.microsoft.com/office/2006/metadata/properties/metaAttributes"/>
-    <ds:schemaRef ds:uri="http://www.w3.org/2001/XMLSchema"/>
-    <ds:schemaRef ds:uri="http://schemas.microsoft.com/office/2006/metadata/properties"/>
-    <ds:schemaRef ds:uri="http://schemas.microsoft.com/sharepoint/v3"/>
-    <ds:schemaRef ds:uri="8fe6d124-157e-4db3-accf-90154e53f67d"/>
-    <ds:schemaRef ds:uri="c59d7448-2016-48ac-8116-1a263a71d5c2"/>
-    <ds:schemaRef ds:uri="http://schemas.microsoft.com/office/2006/documentManagement/types"/>
-    <ds:schemaRef ds:uri="http://schemas.microsoft.com/office/infopath/2007/PartnerControls"/>
-    <ds:schemaRef ds:uri="http://schemas.openxmlformats.org/package/2006/metadata/core-properties"/>
-    <ds:schemaRef ds:uri="http://purl.org/dc/elements/1.1/"/>
-    <ds:schemaRef ds:uri="http://purl.org/dc/terms/"/>
-    <ds:schemaRef ds:uri="http://schemas.microsoft.com/internal/obd"/>
+    <ds:schemaRef ds:uri="http://schemas.microsoft.com/sharepoint/v3/contenttype/forms"/>
   </ds:schemaRefs>
 </ds:datastoreItem>
 </file>
@@ -5970,17 +5958,10 @@
     <ds:schemaRef ds:uri="http://schemas.openxmlformats.org/package/2006/metadata/core-properties"/>
     <ds:schemaRef ds:uri="ef85c670-a924-4738-838f-c9c8efbd965c"/>
     <ds:schemaRef ds:uri="http://purl.org/dc/elements/1.1/"/>
-    <ds:schemaRef ds:uri="8fe6d124-157e-4db3-accf-90154e53f67d"/>
-    <ds:schemaRef ds:uri="http://schemas.microsoft.com/sharepoint/v3"/>
-    <ds:schemaRef ds:uri="c59d7448-2016-48ac-8116-1a263a71d5c2"/>
   </ds:schemaRefs>
 </ds:datastoreItem>
 </file>
 
 <file path=customXml/itemProps3.xml><?xml version="1.0" encoding="utf-8"?>
-<ds:datastoreItem xmlns:ds="http://schemas.openxmlformats.org/officeDocument/2006/customXml" ds:itemID="{2AEABEF3-214C-490F-9B30-301C49BB922A}">
-  <ds:schemaRefs>
-    <ds:schemaRef ds:uri="http://schemas.microsoft.com/sharepoint/v3/contenttype/forms"/>
-  </ds:schemaRefs>
-</ds:datastoreItem>
+<ds:datastoreItem xmlns:ds="http://schemas.openxmlformats.org/officeDocument/2006/customXml" ds:itemID="{ED3C508D-34E3-4102-9D46-CA5396ABF18C}"/>
 </file>